--- a/deck/3331-Trumbull-Investor-Deck-Aug-2026.pptx
+++ b/deck/3331-Trumbull-Investor-Deck-Aug-2026.pptx
@@ -3828,7 +3828,7 @@
                 <a:ea typeface="Calibri" pitchFamily="34" charset="-122"/>
                 <a:cs typeface="Calibri" pitchFamily="34" charset="-120"/>
               </a:rPr>
-              <a:t>Why the raise is capped: Phase 1 needs roughly $750,000 of capital behind the First Merchants construction loan. $700,000 of that is offered as seven $100,000 secured notes to a small group of accredited investors. Phase 2 requires no additional raise.</a:t>
+              <a:t>Why the raise is capped: the raise is $700,000 — seven $100,000 secured notes to a small group of accredited investors — closing alongside the First Merchants construction loan to fund Phase 1. Phase 2 requires no additional raise.</a:t>
             </a:r>
             <a:endParaRPr lang="en-US" sz="1050" dirty="0"/>
           </a:p>
@@ -5966,7 +5966,7 @@
                 <a:ea typeface="Calibri" pitchFamily="34" charset="-122"/>
                 <a:cs typeface="Calibri" pitchFamily="34" charset="-120"/>
               </a:rPr>
-              <a:t>Funded by a First Merchants construction loan plus ~$750,000 of sponsor and investor capital</a:t>
+              <a:t>Funded by a First Merchants construction loan alongside the $700,000 investor note tranche</a:t>
             </a:r>
             <a:endParaRPr lang="en-US" sz="1050" dirty="0"/>
           </a:p>
@@ -5990,7 +5990,7 @@
                 <a:ea typeface="Calibri" pitchFamily="34" charset="-122"/>
                 <a:cs typeface="Calibri" pitchFamily="34" charset="-120"/>
               </a:rPr>
-              <a:t>$700,000 of that is the investor note tranche — seven $100,000 secured notes</a:t>
+              <a:t>Seven $100,000 secured notes — the full raise, and the only raise</a:t>
             </a:r>
             <a:endParaRPr lang="en-US" sz="1050" dirty="0"/>
           </a:p>
@@ -15510,7 +15510,7 @@
                 <a:ea typeface="Calibri" pitchFamily="34" charset="-122"/>
                 <a:cs typeface="Calibri" pitchFamily="34" charset="-120"/>
               </a:rPr>
-              <a:t>Vertically integrated developer and licensed general contractor across Southeast Michigan. Builder and owner on the portfolio below, with roughly 50 rental units held and ~$30M of development active today.
+              <a:t>Vertically integrated developer and licensed general contractor across Southeast Michigan. Builder and owner on 140+ residential for-sale units with more than $100M of completed construction, plus a ~50-unit rental portfolio he owns and his team operates.
 </a:t>
             </a:r>
             <a:pPr indent="0" marL="0">
@@ -15560,8 +15560,8 @@
         </p:nvSpPr>
         <p:spPr>
           <a:xfrm>
-            <a:off x="566928" y="4059936"/>
-            <a:ext cx="2542032" cy="1024128"/>
+            <a:off x="566928" y="4133088"/>
+            <a:ext cx="1664208" cy="1051560"/>
           </a:xfrm>
           <a:prstGeom prst="rect">
             <a:avLst/>
@@ -15592,7 +15592,7 @@
         </p:nvSpPr>
         <p:spPr>
           <a:xfrm>
-            <a:off x="768096" y="4242816"/>
+            <a:off x="768096" y="4315968"/>
             <a:ext cx="82296" cy="82296"/>
           </a:xfrm>
           <a:prstGeom prst="rect">
@@ -15612,24 +15612,24 @@
         </p:nvSpPr>
         <p:spPr>
           <a:xfrm>
-            <a:off x="768096" y="4352544"/>
-            <a:ext cx="2176272" cy="384048"/>
-          </a:xfrm>
-          <a:prstGeom prst="rect">
-            <a:avLst/>
-          </a:prstGeom>
-          <a:noFill/>
-          <a:ln/>
-        </p:spPr>
-        <p:txBody>
-          <a:bodyPr wrap="square" lIns="0" tIns="0" rIns="0" bIns="0" rtlCol="0" anchor="ctr"/>
-          <a:lstStyle/>
-          <a:p>
-            <a:pPr indent="0" marL="0">
-              <a:buNone/>
-            </a:pPr>
-            <a:r>
-              <a:rPr lang="en-US" sz="2500" b="1" dirty="0">
+            <a:off x="768096" y="4425696"/>
+            <a:ext cx="1298448" cy="384048"/>
+          </a:xfrm>
+          <a:prstGeom prst="rect">
+            <a:avLst/>
+          </a:prstGeom>
+          <a:noFill/>
+          <a:ln/>
+        </p:spPr>
+        <p:txBody>
+          <a:bodyPr wrap="square" lIns="0" tIns="0" rIns="0" bIns="0" rtlCol="0" anchor="ctr"/>
+          <a:lstStyle/>
+          <a:p>
+            <a:pPr indent="0" marL="0">
+              <a:buNone/>
+            </a:pPr>
+            <a:r>
+              <a:rPr lang="en-US" sz="2100" b="1" dirty="0">
                 <a:solidFill>
                   <a:srgbClr val="12303C"/>
                 </a:solidFill>
@@ -15637,9 +15637,9 @@
                 <a:ea typeface="Cambria" pitchFamily="34" charset="-122"/>
                 <a:cs typeface="Cambria" pitchFamily="34" charset="-120"/>
               </a:rPr>
-              <a:t>26</a:t>
-            </a:r>
-            <a:endParaRPr lang="en-US" sz="2500" dirty="0"/>
+              <a:t>$100M+</a:t>
+            </a:r>
+            <a:endParaRPr lang="en-US" sz="2100" dirty="0"/>
           </a:p>
         </p:txBody>
       </p:sp>
@@ -15651,8 +15651,8 @@
         </p:nvSpPr>
         <p:spPr>
           <a:xfrm>
-            <a:off x="768096" y="4736592"/>
-            <a:ext cx="2176272" cy="256032"/>
+            <a:off x="768096" y="4809744"/>
+            <a:ext cx="1298448" cy="283464"/>
           </a:xfrm>
           <a:prstGeom prst="rect">
             <a:avLst/>
@@ -15679,7 +15679,7 @@
                 <a:ea typeface="Calibri" pitchFamily="34" charset="-122"/>
                 <a:cs typeface="Calibri" pitchFamily="34" charset="-120"/>
               </a:rPr>
-              <a:t>TOTAL PROJECTS</a:t>
+              <a:t>COMPLETED</a:t>
             </a:r>
             <a:endParaRPr lang="en-US" sz="850" dirty="0"/>
           </a:p>
@@ -15699,7 +15699,7 @@
                 <a:ea typeface="Calibri" pitchFamily="34" charset="-122"/>
                 <a:cs typeface="Calibri" pitchFamily="34" charset="-120"/>
               </a:rPr>
-              <a:t>BUILT OR ACTIVE</a:t>
+              <a:t>CONSTRUCTION</a:t>
             </a:r>
             <a:endParaRPr lang="en-US" sz="850" dirty="0"/>
           </a:p>
@@ -15713,8 +15713,8 @@
         </p:nvSpPr>
         <p:spPr>
           <a:xfrm>
-            <a:off x="3218688" y="4059936"/>
-            <a:ext cx="2542032" cy="1024128"/>
+            <a:off x="2331720" y="4133088"/>
+            <a:ext cx="1664208" cy="1051560"/>
           </a:xfrm>
           <a:prstGeom prst="rect">
             <a:avLst/>
@@ -15745,7 +15745,7 @@
         </p:nvSpPr>
         <p:spPr>
           <a:xfrm>
-            <a:off x="3419856" y="4242816"/>
+            <a:off x="2532888" y="4315968"/>
             <a:ext cx="82296" cy="82296"/>
           </a:xfrm>
           <a:prstGeom prst="rect">
@@ -15765,24 +15765,24 @@
         </p:nvSpPr>
         <p:spPr>
           <a:xfrm>
-            <a:off x="3419856" y="4352544"/>
-            <a:ext cx="2176272" cy="384048"/>
-          </a:xfrm>
-          <a:prstGeom prst="rect">
-            <a:avLst/>
-          </a:prstGeom>
-          <a:noFill/>
-          <a:ln/>
-        </p:spPr>
-        <p:txBody>
-          <a:bodyPr wrap="square" lIns="0" tIns="0" rIns="0" bIns="0" rtlCol="0" anchor="ctr"/>
-          <a:lstStyle/>
-          <a:p>
-            <a:pPr indent="0" marL="0">
-              <a:buNone/>
-            </a:pPr>
-            <a:r>
-              <a:rPr lang="en-US" sz="2500" b="1" dirty="0">
+            <a:off x="2532888" y="4425696"/>
+            <a:ext cx="1298448" cy="384048"/>
+          </a:xfrm>
+          <a:prstGeom prst="rect">
+            <a:avLst/>
+          </a:prstGeom>
+          <a:noFill/>
+          <a:ln/>
+        </p:spPr>
+        <p:txBody>
+          <a:bodyPr wrap="square" lIns="0" tIns="0" rIns="0" bIns="0" rtlCol="0" anchor="ctr"/>
+          <a:lstStyle/>
+          <a:p>
+            <a:pPr indent="0" marL="0">
+              <a:buNone/>
+            </a:pPr>
+            <a:r>
+              <a:rPr lang="en-US" sz="2100" b="1" dirty="0">
                 <a:solidFill>
                   <a:srgbClr val="12303C"/>
                 </a:solidFill>
@@ -15790,9 +15790,9 @@
                 <a:ea typeface="Cambria" pitchFamily="34" charset="-122"/>
                 <a:cs typeface="Cambria" pitchFamily="34" charset="-120"/>
               </a:rPr>
-              <a:t>122</a:t>
-            </a:r>
-            <a:endParaRPr lang="en-US" sz="2500" dirty="0"/>
+              <a:t>140+</a:t>
+            </a:r>
+            <a:endParaRPr lang="en-US" sz="2100" dirty="0"/>
           </a:p>
         </p:txBody>
       </p:sp>
@@ -15804,8 +15804,8 @@
         </p:nvSpPr>
         <p:spPr>
           <a:xfrm>
-            <a:off x="3419856" y="4736592"/>
-            <a:ext cx="2176272" cy="256032"/>
+            <a:off x="2532888" y="4809744"/>
+            <a:ext cx="1298448" cy="283464"/>
           </a:xfrm>
           <a:prstGeom prst="rect">
             <a:avLst/>
@@ -15832,7 +15832,7 @@
                 <a:ea typeface="Calibri" pitchFamily="34" charset="-122"/>
                 <a:cs typeface="Calibri" pitchFamily="34" charset="-120"/>
               </a:rPr>
-              <a:t>TOTAL UNITS</a:t>
+              <a:t>UNITS BUILT</a:t>
             </a:r>
             <a:endParaRPr lang="en-US" sz="850" dirty="0"/>
           </a:p>
@@ -15852,7 +15852,7 @@
                 <a:ea typeface="Calibri" pitchFamily="34" charset="-122"/>
                 <a:cs typeface="Calibri" pitchFamily="34" charset="-120"/>
               </a:rPr>
-              <a:t>ACROSS PORTFOLIO</a:t>
+              <a:t>&amp; SOLD</a:t>
             </a:r>
             <a:endParaRPr lang="en-US" sz="850" dirty="0"/>
           </a:p>
@@ -15866,8 +15866,8 @@
         </p:nvSpPr>
         <p:spPr>
           <a:xfrm>
-            <a:off x="566928" y="5157216"/>
-            <a:ext cx="2542032" cy="1024128"/>
+            <a:off x="4096512" y="4133088"/>
+            <a:ext cx="1664208" cy="1051560"/>
           </a:xfrm>
           <a:prstGeom prst="rect">
             <a:avLst/>
@@ -15898,7 +15898,7 @@
         </p:nvSpPr>
         <p:spPr>
           <a:xfrm>
-            <a:off x="768096" y="5340096"/>
+            <a:off x="4297680" y="4315968"/>
             <a:ext cx="82296" cy="82296"/>
           </a:xfrm>
           <a:prstGeom prst="rect">
@@ -15918,24 +15918,24 @@
         </p:nvSpPr>
         <p:spPr>
           <a:xfrm>
-            <a:off x="768096" y="5449824"/>
-            <a:ext cx="2176272" cy="384048"/>
-          </a:xfrm>
-          <a:prstGeom prst="rect">
-            <a:avLst/>
-          </a:prstGeom>
-          <a:noFill/>
-          <a:ln/>
-        </p:spPr>
-        <p:txBody>
-          <a:bodyPr wrap="square" lIns="0" tIns="0" rIns="0" bIns="0" rtlCol="0" anchor="ctr"/>
-          <a:lstStyle/>
-          <a:p>
-            <a:pPr indent="0" marL="0">
-              <a:buNone/>
-            </a:pPr>
-            <a:r>
-              <a:rPr lang="en-US" sz="2500" b="1" dirty="0">
+            <a:off x="4297680" y="4425696"/>
+            <a:ext cx="1298448" cy="384048"/>
+          </a:xfrm>
+          <a:prstGeom prst="rect">
+            <a:avLst/>
+          </a:prstGeom>
+          <a:noFill/>
+          <a:ln/>
+        </p:spPr>
+        <p:txBody>
+          <a:bodyPr wrap="square" lIns="0" tIns="0" rIns="0" bIns="0" rtlCol="0" anchor="ctr"/>
+          <a:lstStyle/>
+          <a:p>
+            <a:pPr indent="0" marL="0">
+              <a:buNone/>
+            </a:pPr>
+            <a:r>
+              <a:rPr lang="en-US" sz="2100" b="1" dirty="0">
                 <a:solidFill>
                   <a:srgbClr val="12303C"/>
                 </a:solidFill>
@@ -15943,9 +15943,9 @@
                 <a:ea typeface="Cambria" pitchFamily="34" charset="-122"/>
                 <a:cs typeface="Cambria" pitchFamily="34" charset="-120"/>
               </a:rPr>
-              <a:t>75</a:t>
-            </a:r>
-            <a:endParaRPr lang="en-US" sz="2500" dirty="0"/>
+              <a:t>50+</a:t>
+            </a:r>
+            <a:endParaRPr lang="en-US" sz="2100" dirty="0"/>
           </a:p>
         </p:txBody>
       </p:sp>
@@ -15957,8 +15957,8 @@
         </p:nvSpPr>
         <p:spPr>
           <a:xfrm>
-            <a:off x="768096" y="5833872"/>
-            <a:ext cx="2176272" cy="256032"/>
+            <a:off x="4297680" y="4809744"/>
+            <a:ext cx="1298448" cy="283464"/>
           </a:xfrm>
           <a:prstGeom prst="rect">
             <a:avLst/>
@@ -15985,7 +15985,7 @@
                 <a:ea typeface="Calibri" pitchFamily="34" charset="-122"/>
                 <a:cs typeface="Calibri" pitchFamily="34" charset="-120"/>
               </a:rPr>
-              <a:t>UNITS DELIVERED</a:t>
+              <a:t>RENTAL UNITS</a:t>
             </a:r>
             <a:endParaRPr lang="en-US" sz="850" dirty="0"/>
           </a:p>
@@ -16005,7 +16005,7 @@
                 <a:ea typeface="Calibri" pitchFamily="34" charset="-122"/>
                 <a:cs typeface="Calibri" pitchFamily="34" charset="-120"/>
               </a:rPr>
-              <a:t>20 COMPLETED PROJECTS</a:t>
+              <a:t>OWNED</a:t>
             </a:r>
             <a:endParaRPr lang="en-US" sz="850" dirty="0"/>
           </a:p>
@@ -16019,8 +16019,150 @@
         </p:nvSpPr>
         <p:spPr>
           <a:xfrm>
-            <a:off x="3218688" y="5157216"/>
-            <a:ext cx="2542032" cy="1024128"/>
+            <a:off x="5943600" y="1664208"/>
+            <a:ext cx="5650992" cy="292608"/>
+          </a:xfrm>
+          <a:prstGeom prst="rect">
+            <a:avLst/>
+          </a:prstGeom>
+          <a:solidFill>
+            <a:srgbClr val="F0F4F5"/>
+          </a:solidFill>
+          <a:ln w="9525">
+            <a:solidFill>
+              <a:srgbClr val="E2E8E9"/>
+            </a:solidFill>
+            <a:prstDash val="solid"/>
+          </a:ln>
+        </p:spPr>
+      </p:sp>
+      <p:sp>
+        <p:nvSpPr>
+          <p:cNvPr id="19" name="Text 17"/>
+          <p:cNvSpPr/>
+          <p:nvPr/>
+        </p:nvSpPr>
+        <p:spPr>
+          <a:xfrm>
+            <a:off x="6053328" y="1664208"/>
+            <a:ext cx="3024632" cy="292608"/>
+          </a:xfrm>
+          <a:prstGeom prst="rect">
+            <a:avLst/>
+          </a:prstGeom>
+          <a:noFill/>
+          <a:ln/>
+        </p:spPr>
+        <p:txBody>
+          <a:bodyPr wrap="square" lIns="0" tIns="0" rIns="0" bIns="0" rtlCol="0" anchor="ctr"/>
+          <a:lstStyle/>
+          <a:p>
+            <a:pPr algn="l" indent="0" marL="0">
+              <a:buNone/>
+            </a:pPr>
+            <a:r>
+              <a:rPr lang="en-US" sz="850" b="1" spc="120" kern="0" dirty="0">
+                <a:solidFill>
+                  <a:srgbClr val="6B8792"/>
+                </a:solidFill>
+                <a:latin typeface="Calibri" pitchFamily="34" charset="0"/>
+                <a:ea typeface="Calibri" pitchFamily="34" charset="-122"/>
+                <a:cs typeface="Calibri" pitchFamily="34" charset="-120"/>
+              </a:rPr>
+              <a:t>COMPLETED PROJECTS</a:t>
+            </a:r>
+            <a:endParaRPr lang="en-US" sz="850" dirty="0"/>
+          </a:p>
+        </p:txBody>
+      </p:sp>
+      <p:sp>
+        <p:nvSpPr>
+          <p:cNvPr id="20" name="Text 18"/>
+          <p:cNvSpPr/>
+          <p:nvPr/>
+        </p:nvSpPr>
+        <p:spPr>
+          <a:xfrm>
+            <a:off x="9297416" y="1664208"/>
+            <a:ext cx="1193292" cy="292608"/>
+          </a:xfrm>
+          <a:prstGeom prst="rect">
+            <a:avLst/>
+          </a:prstGeom>
+          <a:noFill/>
+          <a:ln/>
+        </p:spPr>
+        <p:txBody>
+          <a:bodyPr wrap="square" lIns="0" tIns="0" rIns="0" bIns="0" rtlCol="0" anchor="ctr"/>
+          <a:lstStyle/>
+          <a:p>
+            <a:pPr algn="r" indent="0" marL="0">
+              <a:buNone/>
+            </a:pPr>
+            <a:r>
+              <a:rPr lang="en-US" sz="850" b="1" spc="120" kern="0" dirty="0">
+                <a:solidFill>
+                  <a:srgbClr val="6B8792"/>
+                </a:solidFill>
+                <a:latin typeface="Calibri" pitchFamily="34" charset="0"/>
+                <a:ea typeface="Calibri" pitchFamily="34" charset="-122"/>
+                <a:cs typeface="Calibri" pitchFamily="34" charset="-120"/>
+              </a:rPr>
+              <a:t>TYPE</a:t>
+            </a:r>
+            <a:endParaRPr lang="en-US" sz="850" dirty="0"/>
+          </a:p>
+        </p:txBody>
+      </p:sp>
+      <p:sp>
+        <p:nvSpPr>
+          <p:cNvPr id="21" name="Text 19"/>
+          <p:cNvSpPr/>
+          <p:nvPr/>
+        </p:nvSpPr>
+        <p:spPr>
+          <a:xfrm>
+            <a:off x="10710164" y="1664208"/>
+            <a:ext cx="774700" cy="292608"/>
+          </a:xfrm>
+          <a:prstGeom prst="rect">
+            <a:avLst/>
+          </a:prstGeom>
+          <a:noFill/>
+          <a:ln/>
+        </p:spPr>
+        <p:txBody>
+          <a:bodyPr wrap="square" lIns="0" tIns="0" rIns="0" bIns="0" rtlCol="0" anchor="ctr"/>
+          <a:lstStyle/>
+          <a:p>
+            <a:pPr algn="r" indent="0" marL="0">
+              <a:buNone/>
+            </a:pPr>
+            <a:r>
+              <a:rPr lang="en-US" sz="850" b="1" spc="120" kern="0" dirty="0">
+                <a:solidFill>
+                  <a:srgbClr val="6B8792"/>
+                </a:solidFill>
+                <a:latin typeface="Calibri" pitchFamily="34" charset="0"/>
+                <a:ea typeface="Calibri" pitchFamily="34" charset="-122"/>
+                <a:cs typeface="Calibri" pitchFamily="34" charset="-120"/>
+              </a:rPr>
+              <a:t>UNITS</a:t>
+            </a:r>
+            <a:endParaRPr lang="en-US" sz="850" dirty="0"/>
+          </a:p>
+        </p:txBody>
+      </p:sp>
+      <p:sp>
+        <p:nvSpPr>
+          <p:cNvPr id="22" name="Shape 20"/>
+          <p:cNvSpPr/>
+          <p:nvPr/>
+        </p:nvSpPr>
+        <p:spPr>
+          <a:xfrm>
+            <a:off x="5943600" y="1956816"/>
+            <a:ext cx="5650992" cy="324612"/>
           </a:xfrm>
           <a:prstGeom prst="rect">
             <a:avLst/>
@@ -16034,197 +16176,44 @@
             </a:solidFill>
             <a:prstDash val="solid"/>
           </a:ln>
-          <a:effectLst>
-            <a:outerShdw sx="100000" sy="100000" kx="0" ky="0" algn="bl" rotWithShape="0" blurRad="101600" dist="25400" dir="5400000">
-              <a:srgbClr val="0B2029">
-                <a:alpha val="9000"/>
-              </a:srgbClr>
-            </a:outerShdw>
-          </a:effectLst>
-        </p:spPr>
-      </p:sp>
-      <p:sp>
-        <p:nvSpPr>
-          <p:cNvPr id="19" name="Shape 17"/>
-          <p:cNvSpPr/>
-          <p:nvPr/>
-        </p:nvSpPr>
-        <p:spPr>
-          <a:xfrm>
-            <a:off x="3419856" y="5340096"/>
-            <a:ext cx="82296" cy="82296"/>
-          </a:xfrm>
-          <a:prstGeom prst="rect">
-            <a:avLst/>
-          </a:prstGeom>
-          <a:solidFill>
-            <a:srgbClr val="D9A441"/>
-          </a:solidFill>
-          <a:ln/>
-        </p:spPr>
-      </p:sp>
-      <p:sp>
-        <p:nvSpPr>
-          <p:cNvPr id="20" name="Text 18"/>
-          <p:cNvSpPr/>
-          <p:nvPr/>
-        </p:nvSpPr>
-        <p:spPr>
-          <a:xfrm>
-            <a:off x="3419856" y="5449824"/>
-            <a:ext cx="2176272" cy="384048"/>
-          </a:xfrm>
-          <a:prstGeom prst="rect">
-            <a:avLst/>
-          </a:prstGeom>
-          <a:noFill/>
-          <a:ln/>
-        </p:spPr>
-        <p:txBody>
-          <a:bodyPr wrap="square" lIns="0" tIns="0" rIns="0" bIns="0" rtlCol="0" anchor="ctr"/>
-          <a:lstStyle/>
-          <a:p>
-            <a:pPr indent="0" marL="0">
-              <a:buNone/>
-            </a:pPr>
-            <a:r>
-              <a:rPr lang="en-US" sz="2500" b="1" dirty="0">
+        </p:spPr>
+      </p:sp>
+      <p:sp>
+        <p:nvSpPr>
+          <p:cNvPr id="23" name="Text 21"/>
+          <p:cNvSpPr/>
+          <p:nvPr/>
+        </p:nvSpPr>
+        <p:spPr>
+          <a:xfrm>
+            <a:off x="6053328" y="1956816"/>
+            <a:ext cx="3024632" cy="324612"/>
+          </a:xfrm>
+          <a:prstGeom prst="rect">
+            <a:avLst/>
+          </a:prstGeom>
+          <a:noFill/>
+          <a:ln/>
+        </p:spPr>
+        <p:txBody>
+          <a:bodyPr wrap="square" lIns="0" tIns="0" rIns="0" bIns="0" rtlCol="0" anchor="ctr"/>
+          <a:lstStyle/>
+          <a:p>
+            <a:pPr algn="l" indent="0" marL="0">
+              <a:buNone/>
+            </a:pPr>
+            <a:r>
+              <a:rPr lang="en-US" sz="1000" dirty="0">
                 <a:solidFill>
                   <a:srgbClr val="12303C"/>
                 </a:solidFill>
-                <a:latin typeface="Cambria" pitchFamily="34" charset="0"/>
-                <a:ea typeface="Cambria" pitchFamily="34" charset="-122"/>
-                <a:cs typeface="Cambria" pitchFamily="34" charset="-120"/>
-              </a:rPr>
-              <a:t>47</a:t>
-            </a:r>
-            <a:endParaRPr lang="en-US" sz="2500" dirty="0"/>
-          </a:p>
-        </p:txBody>
-      </p:sp>
-      <p:sp>
-        <p:nvSpPr>
-          <p:cNvPr id="21" name="Text 19"/>
-          <p:cNvSpPr/>
-          <p:nvPr/>
-        </p:nvSpPr>
-        <p:spPr>
-          <a:xfrm>
-            <a:off x="3419856" y="5833872"/>
-            <a:ext cx="2176272" cy="256032"/>
-          </a:xfrm>
-          <a:prstGeom prst="rect">
-            <a:avLst/>
-          </a:prstGeom>
-          <a:noFill/>
-          <a:ln/>
-        </p:spPr>
-        <p:txBody>
-          <a:bodyPr wrap="square" lIns="0" tIns="0" rIns="0" bIns="0" rtlCol="0" anchor="t"/>
-          <a:lstStyle/>
-          <a:p>
-            <a:pPr indent="0" marL="0">
-              <a:lnSpc>
-                <a:spcPts val="1050"/>
-              </a:lnSpc>
-              <a:buNone/>
-            </a:pPr>
-            <a:r>
-              <a:rPr lang="en-US" sz="850" spc="90" kern="0" dirty="0">
-                <a:solidFill>
-                  <a:srgbClr val="6B8792"/>
-                </a:solidFill>
-                <a:latin typeface="Calibri" pitchFamily="34" charset="0"/>
-                <a:ea typeface="Calibri" pitchFamily="34" charset="-122"/>
-                <a:cs typeface="Calibri" pitchFamily="34" charset="-120"/>
-              </a:rPr>
-              <a:t>UNITS IN DEVELOPMENT</a:t>
-            </a:r>
-            <a:endParaRPr lang="en-US" sz="850" dirty="0"/>
-          </a:p>
-          <a:p>
-            <a:pPr indent="0" marL="0">
-              <a:lnSpc>
-                <a:spcPts val="1050"/>
-              </a:lnSpc>
-              <a:buNone/>
-            </a:pPr>
-            <a:r>
-              <a:rPr lang="en-US" sz="850" spc="90" kern="0" dirty="0">
-                <a:solidFill>
-                  <a:srgbClr val="6B8792"/>
-                </a:solidFill>
-                <a:latin typeface="Calibri" pitchFamily="34" charset="0"/>
-                <a:ea typeface="Calibri" pitchFamily="34" charset="-122"/>
-                <a:cs typeface="Calibri" pitchFamily="34" charset="-120"/>
-              </a:rPr>
-              <a:t>6 ACTIVE PROJECTS</a:t>
-            </a:r>
-            <a:endParaRPr lang="en-US" sz="850" dirty="0"/>
-          </a:p>
-        </p:txBody>
-      </p:sp>
-      <p:sp>
-        <p:nvSpPr>
-          <p:cNvPr id="22" name="Shape 20"/>
-          <p:cNvSpPr/>
-          <p:nvPr/>
-        </p:nvSpPr>
-        <p:spPr>
-          <a:xfrm>
-            <a:off x="5943600" y="1664208"/>
-            <a:ext cx="5650992" cy="292608"/>
-          </a:xfrm>
-          <a:prstGeom prst="rect">
-            <a:avLst/>
-          </a:prstGeom>
-          <a:solidFill>
-            <a:srgbClr val="F0F4F5"/>
-          </a:solidFill>
-          <a:ln w="9525">
-            <a:solidFill>
-              <a:srgbClr val="E2E8E9"/>
-            </a:solidFill>
-            <a:prstDash val="solid"/>
-          </a:ln>
-        </p:spPr>
-      </p:sp>
-      <p:sp>
-        <p:nvSpPr>
-          <p:cNvPr id="23" name="Text 21"/>
-          <p:cNvSpPr/>
-          <p:nvPr/>
-        </p:nvSpPr>
-        <p:spPr>
-          <a:xfrm>
-            <a:off x="6053328" y="1664208"/>
-            <a:ext cx="2760158" cy="292608"/>
-          </a:xfrm>
-          <a:prstGeom prst="rect">
-            <a:avLst/>
-          </a:prstGeom>
-          <a:noFill/>
-          <a:ln/>
-        </p:spPr>
-        <p:txBody>
-          <a:bodyPr wrap="square" lIns="0" tIns="0" rIns="0" bIns="0" rtlCol="0" anchor="ctr"/>
-          <a:lstStyle/>
-          <a:p>
-            <a:pPr algn="l" indent="0" marL="0">
-              <a:buNone/>
-            </a:pPr>
-            <a:r>
-              <a:rPr lang="en-US" sz="850" b="1" spc="120" kern="0" dirty="0">
-                <a:solidFill>
-                  <a:srgbClr val="6B8792"/>
-                </a:solidFill>
-                <a:latin typeface="Calibri" pitchFamily="34" charset="0"/>
-                <a:ea typeface="Calibri" pitchFamily="34" charset="-122"/>
-                <a:cs typeface="Calibri" pitchFamily="34" charset="-120"/>
-              </a:rPr>
-              <a:t>ACTIVE PIPELINE</a:t>
-            </a:r>
-            <a:endParaRPr lang="en-US" sz="850" dirty="0"/>
+                <a:latin typeface="Calibri" pitchFamily="34" charset="0"/>
+                <a:ea typeface="Calibri" pitchFamily="34" charset="-122"/>
+                <a:cs typeface="Calibri" pitchFamily="34" charset="-120"/>
+              </a:rPr>
+              <a:t>Wesburn Villas</a:t>
+            </a:r>
+            <a:endParaRPr lang="en-US" sz="1000" dirty="0"/>
           </a:p>
         </p:txBody>
       </p:sp>
@@ -16236,8 +16225,8 @@
         </p:nvSpPr>
         <p:spPr>
           <a:xfrm>
-            <a:off x="9032942" y="1664208"/>
-            <a:ext cx="1321724" cy="292608"/>
+            <a:off x="9297416" y="1956816"/>
+            <a:ext cx="1193292" cy="324612"/>
           </a:xfrm>
           <a:prstGeom prst="rect">
             <a:avLst/>
@@ -16253,17 +16242,17 @@
               <a:buNone/>
             </a:pPr>
             <a:r>
-              <a:rPr lang="en-US" sz="850" b="1" spc="120" kern="0" dirty="0">
-                <a:solidFill>
-                  <a:srgbClr val="6B8792"/>
-                </a:solidFill>
-                <a:latin typeface="Calibri" pitchFamily="34" charset="0"/>
-                <a:ea typeface="Calibri" pitchFamily="34" charset="-122"/>
-                <a:cs typeface="Calibri" pitchFamily="34" charset="-120"/>
-              </a:rPr>
-              <a:t>TYPE</a:t>
-            </a:r>
-            <a:endParaRPr lang="en-US" sz="850" dirty="0"/>
+              <a:rPr lang="en-US" sz="1000" dirty="0">
+                <a:solidFill>
+                  <a:srgbClr val="47606B"/>
+                </a:solidFill>
+                <a:latin typeface="Calibri" pitchFamily="34" charset="0"/>
+                <a:ea typeface="Calibri" pitchFamily="34" charset="-122"/>
+                <a:cs typeface="Calibri" pitchFamily="34" charset="-120"/>
+              </a:rPr>
+              <a:t>Townhomes</a:t>
+            </a:r>
+            <a:endParaRPr lang="en-US" sz="1000" dirty="0"/>
           </a:p>
         </p:txBody>
       </p:sp>
@@ -16275,8 +16264,8 @@
         </p:nvSpPr>
         <p:spPr>
           <a:xfrm>
-            <a:off x="10574122" y="1664208"/>
-            <a:ext cx="910742" cy="292608"/>
+            <a:off x="10710164" y="1956816"/>
+            <a:ext cx="774700" cy="324612"/>
           </a:xfrm>
           <a:prstGeom prst="rect">
             <a:avLst/>
@@ -16292,17 +16281,17 @@
               <a:buNone/>
             </a:pPr>
             <a:r>
-              <a:rPr lang="en-US" sz="850" b="1" spc="120" kern="0" dirty="0">
-                <a:solidFill>
-                  <a:srgbClr val="6B8792"/>
-                </a:solidFill>
-                <a:latin typeface="Calibri" pitchFamily="34" charset="0"/>
-                <a:ea typeface="Calibri" pitchFamily="34" charset="-122"/>
-                <a:cs typeface="Calibri" pitchFamily="34" charset="-120"/>
-              </a:rPr>
-              <a:t>UNITS</a:t>
-            </a:r>
-            <a:endParaRPr lang="en-US" sz="850" dirty="0"/>
+              <a:rPr lang="en-US" sz="1000" dirty="0">
+                <a:solidFill>
+                  <a:srgbClr val="47606B"/>
+                </a:solidFill>
+                <a:latin typeface="Calibri" pitchFamily="34" charset="0"/>
+                <a:ea typeface="Calibri" pitchFamily="34" charset="-122"/>
+                <a:cs typeface="Calibri" pitchFamily="34" charset="-120"/>
+              </a:rPr>
+              <a:t>28</a:t>
+            </a:r>
+            <a:endParaRPr lang="en-US" sz="1000" dirty="0"/>
           </a:p>
         </p:txBody>
       </p:sp>
@@ -16314,7 +16303,7 @@
         </p:nvSpPr>
         <p:spPr>
           <a:xfrm>
-            <a:off x="5943600" y="1956816"/>
+            <a:off x="5943600" y="2281428"/>
             <a:ext cx="5650992" cy="324612"/>
           </a:xfrm>
           <a:prstGeom prst="rect">
@@ -16339,8 +16328,8 @@
         </p:nvSpPr>
         <p:spPr>
           <a:xfrm>
-            <a:off x="6053328" y="1956816"/>
-            <a:ext cx="2760158" cy="324612"/>
+            <a:off x="6053328" y="2281428"/>
+            <a:ext cx="3024632" cy="324612"/>
           </a:xfrm>
           <a:prstGeom prst="rect">
             <a:avLst/>
@@ -16364,7 +16353,7 @@
                 <a:ea typeface="Calibri" pitchFamily="34" charset="-122"/>
                 <a:cs typeface="Calibri" pitchFamily="34" charset="-120"/>
               </a:rPr>
-              <a:t>106 E. Forest — Detroit</a:t>
+              <a:t>iPG — Detroit</a:t>
             </a:r>
             <a:endParaRPr lang="en-US" sz="1000" dirty="0"/>
           </a:p>
@@ -16378,8 +16367,8 @@
         </p:nvSpPr>
         <p:spPr>
           <a:xfrm>
-            <a:off x="9032942" y="1956816"/>
-            <a:ext cx="1321724" cy="324612"/>
+            <a:off x="9297416" y="2281428"/>
+            <a:ext cx="1193292" cy="324612"/>
           </a:xfrm>
           <a:prstGeom prst="rect">
             <a:avLst/>
@@ -16417,8 +16406,8 @@
         </p:nvSpPr>
         <p:spPr>
           <a:xfrm>
-            <a:off x="10574122" y="1956816"/>
-            <a:ext cx="910742" cy="324612"/>
+            <a:off x="10710164" y="2281428"/>
+            <a:ext cx="774700" cy="324612"/>
           </a:xfrm>
           <a:prstGeom prst="rect">
             <a:avLst/>
@@ -16442,7 +16431,7 @@
                 <a:ea typeface="Calibri" pitchFamily="34" charset="-122"/>
                 <a:cs typeface="Calibri" pitchFamily="34" charset="-120"/>
               </a:rPr>
-              <a:t>12</a:t>
+              <a:t>16</a:t>
             </a:r>
             <a:endParaRPr lang="en-US" sz="1000" dirty="0"/>
           </a:p>
@@ -16456,7 +16445,7 @@
         </p:nvSpPr>
         <p:spPr>
           <a:xfrm>
-            <a:off x="5943600" y="2281428"/>
+            <a:off x="5943600" y="2606040"/>
             <a:ext cx="5650992" cy="324612"/>
           </a:xfrm>
           <a:prstGeom prst="rect">
@@ -16481,8 +16470,8 @@
         </p:nvSpPr>
         <p:spPr>
           <a:xfrm>
-            <a:off x="6053328" y="2281428"/>
-            <a:ext cx="2760158" cy="324612"/>
+            <a:off x="6053328" y="2606040"/>
+            <a:ext cx="3024632" cy="324612"/>
           </a:xfrm>
           <a:prstGeom prst="rect">
             <a:avLst/>
@@ -16506,7 +16495,7 @@
                 <a:ea typeface="Calibri" pitchFamily="34" charset="-122"/>
                 <a:cs typeface="Calibri" pitchFamily="34" charset="-120"/>
               </a:rPr>
-              <a:t>1530 Bagley — Detroit</a:t>
+              <a:t>Harrison 12 — North Corktown</a:t>
             </a:r>
             <a:endParaRPr lang="en-US" sz="1000" dirty="0"/>
           </a:p>
@@ -16520,8 +16509,8 @@
         </p:nvSpPr>
         <p:spPr>
           <a:xfrm>
-            <a:off x="9032942" y="2281428"/>
-            <a:ext cx="1321724" cy="324612"/>
+            <a:off x="9297416" y="2606040"/>
+            <a:ext cx="1193292" cy="324612"/>
           </a:xfrm>
           <a:prstGeom prst="rect">
             <a:avLst/>
@@ -16545,7 +16534,7 @@
                 <a:ea typeface="Calibri" pitchFamily="34" charset="-122"/>
                 <a:cs typeface="Calibri" pitchFamily="34" charset="-120"/>
               </a:rPr>
-              <a:t>Apartments</a:t>
+              <a:t>Townhomes</a:t>
             </a:r>
             <a:endParaRPr lang="en-US" sz="1000" dirty="0"/>
           </a:p>
@@ -16559,8 +16548,8 @@
         </p:nvSpPr>
         <p:spPr>
           <a:xfrm>
-            <a:off x="10574122" y="2281428"/>
-            <a:ext cx="910742" cy="324612"/>
+            <a:off x="10710164" y="2606040"/>
+            <a:ext cx="774700" cy="324612"/>
           </a:xfrm>
           <a:prstGeom prst="rect">
             <a:avLst/>
@@ -16598,7 +16587,7 @@
         </p:nvSpPr>
         <p:spPr>
           <a:xfrm>
-            <a:off x="5943600" y="2606040"/>
+            <a:off x="5943600" y="2930652"/>
             <a:ext cx="5650992" cy="324612"/>
           </a:xfrm>
           <a:prstGeom prst="rect">
@@ -16623,8 +16612,8 @@
         </p:nvSpPr>
         <p:spPr>
           <a:xfrm>
-            <a:off x="6053328" y="2606040"/>
-            <a:ext cx="2760158" cy="324612"/>
+            <a:off x="6053328" y="2930652"/>
+            <a:ext cx="3024632" cy="324612"/>
           </a:xfrm>
           <a:prstGeom prst="rect">
             <a:avLst/>
@@ -16648,7 +16637,7 @@
                 <a:ea typeface="Calibri" pitchFamily="34" charset="-122"/>
                 <a:cs typeface="Calibri" pitchFamily="34" charset="-120"/>
               </a:rPr>
-              <a:t>3984 Commonwealth — Detroit</a:t>
+              <a:t>North Corktown 11</a:t>
             </a:r>
             <a:endParaRPr lang="en-US" sz="1000" dirty="0"/>
           </a:p>
@@ -16662,8 +16651,8 @@
         </p:nvSpPr>
         <p:spPr>
           <a:xfrm>
-            <a:off x="9032942" y="2606040"/>
-            <a:ext cx="1321724" cy="324612"/>
+            <a:off x="9297416" y="2930652"/>
+            <a:ext cx="1193292" cy="324612"/>
           </a:xfrm>
           <a:prstGeom prst="rect">
             <a:avLst/>
@@ -16687,7 +16676,7 @@
                 <a:ea typeface="Calibri" pitchFamily="34" charset="-122"/>
                 <a:cs typeface="Calibri" pitchFamily="34" charset="-120"/>
               </a:rPr>
-              <a:t>Apartments</a:t>
+              <a:t>Townhomes</a:t>
             </a:r>
             <a:endParaRPr lang="en-US" sz="1000" dirty="0"/>
           </a:p>
@@ -16701,8 +16690,8 @@
         </p:nvSpPr>
         <p:spPr>
           <a:xfrm>
-            <a:off x="10574122" y="2606040"/>
-            <a:ext cx="910742" cy="324612"/>
+            <a:off x="10710164" y="2930652"/>
+            <a:ext cx="774700" cy="324612"/>
           </a:xfrm>
           <a:prstGeom prst="rect">
             <a:avLst/>
@@ -16726,7 +16715,7 @@
                 <a:ea typeface="Calibri" pitchFamily="34" charset="-122"/>
                 <a:cs typeface="Calibri" pitchFamily="34" charset="-120"/>
               </a:rPr>
-              <a:t>12</a:t>
+              <a:t>11</a:t>
             </a:r>
             <a:endParaRPr lang="en-US" sz="1000" dirty="0"/>
           </a:p>
@@ -16740,7 +16729,7 @@
         </p:nvSpPr>
         <p:spPr>
           <a:xfrm>
-            <a:off x="5943600" y="2930652"/>
+            <a:off x="5943600" y="3255264"/>
             <a:ext cx="5650992" cy="324612"/>
           </a:xfrm>
           <a:prstGeom prst="rect">
@@ -16765,8 +16754,8 @@
         </p:nvSpPr>
         <p:spPr>
           <a:xfrm>
-            <a:off x="6053328" y="2930652"/>
-            <a:ext cx="2760158" cy="324612"/>
+            <a:off x="6053328" y="3255264"/>
+            <a:ext cx="3024632" cy="324612"/>
           </a:xfrm>
           <a:prstGeom prst="rect">
             <a:avLst/>
@@ -16790,7 +16779,7 @@
                 <a:ea typeface="Calibri" pitchFamily="34" charset="-122"/>
                 <a:cs typeface="Calibri" pitchFamily="34" charset="-120"/>
               </a:rPr>
-              <a:t>16740 E. Ave of the Fountains — AZ</a:t>
+              <a:t>Sycamore Park — North Corktown</a:t>
             </a:r>
             <a:endParaRPr lang="en-US" sz="1000" dirty="0"/>
           </a:p>
@@ -16804,8 +16793,8 @@
         </p:nvSpPr>
         <p:spPr>
           <a:xfrm>
-            <a:off x="9032942" y="2930652"/>
-            <a:ext cx="1321724" cy="324612"/>
+            <a:off x="9297416" y="3255264"/>
+            <a:ext cx="1193292" cy="324612"/>
           </a:xfrm>
           <a:prstGeom prst="rect">
             <a:avLst/>
@@ -16843,8 +16832,8 @@
         </p:nvSpPr>
         <p:spPr>
           <a:xfrm>
-            <a:off x="10574122" y="2930652"/>
-            <a:ext cx="910742" cy="324612"/>
+            <a:off x="10710164" y="3255264"/>
+            <a:ext cx="774700" cy="324612"/>
           </a:xfrm>
           <a:prstGeom prst="rect">
             <a:avLst/>
@@ -16868,7 +16857,7 @@
                 <a:ea typeface="Calibri" pitchFamily="34" charset="-122"/>
                 <a:cs typeface="Calibri" pitchFamily="34" charset="-120"/>
               </a:rPr>
-              <a:t>9</a:t>
+              <a:t>10</a:t>
             </a:r>
             <a:endParaRPr lang="en-US" sz="1000" dirty="0"/>
           </a:p>
@@ -16882,7 +16871,7 @@
         </p:nvSpPr>
         <p:spPr>
           <a:xfrm>
-            <a:off x="5943600" y="3255264"/>
+            <a:off x="5943600" y="3579876"/>
             <a:ext cx="5650992" cy="324612"/>
           </a:xfrm>
           <a:prstGeom prst="rect">
@@ -16907,8 +16896,8 @@
         </p:nvSpPr>
         <p:spPr>
           <a:xfrm>
-            <a:off x="6053328" y="3255264"/>
-            <a:ext cx="2760158" cy="324612"/>
+            <a:off x="6053328" y="3579876"/>
+            <a:ext cx="3024632" cy="324612"/>
           </a:xfrm>
           <a:prstGeom prst="rect">
             <a:avLst/>
@@ -16932,7 +16921,7 @@
                 <a:ea typeface="Calibri" pitchFamily="34" charset="-122"/>
                 <a:cs typeface="Calibri" pitchFamily="34" charset="-120"/>
               </a:rPr>
-              <a:t>4142 4th St — Detroit</a:t>
+              <a:t>2221 &amp; 2225 Wabash — Detroit</a:t>
             </a:r>
             <a:endParaRPr lang="en-US" sz="1000" dirty="0"/>
           </a:p>
@@ -16946,8 +16935,8 @@
         </p:nvSpPr>
         <p:spPr>
           <a:xfrm>
-            <a:off x="9032942" y="3255264"/>
-            <a:ext cx="1321724" cy="324612"/>
+            <a:off x="9297416" y="3579876"/>
+            <a:ext cx="1193292" cy="324612"/>
           </a:xfrm>
           <a:prstGeom prst="rect">
             <a:avLst/>
@@ -16971,7 +16960,7 @@
                 <a:ea typeface="Calibri" pitchFamily="34" charset="-122"/>
                 <a:cs typeface="Calibri" pitchFamily="34" charset="-120"/>
               </a:rPr>
-              <a:t>Custom home</a:t>
+              <a:t>Multi</a:t>
             </a:r>
             <a:endParaRPr lang="en-US" sz="1000" dirty="0"/>
           </a:p>
@@ -16985,8 +16974,8 @@
         </p:nvSpPr>
         <p:spPr>
           <a:xfrm>
-            <a:off x="10574122" y="3255264"/>
-            <a:ext cx="910742" cy="324612"/>
+            <a:off x="10710164" y="3579876"/>
+            <a:ext cx="774700" cy="324612"/>
           </a:xfrm>
           <a:prstGeom prst="rect">
             <a:avLst/>
@@ -17010,7 +16999,7 @@
                 <a:ea typeface="Calibri" pitchFamily="34" charset="-122"/>
                 <a:cs typeface="Calibri" pitchFamily="34" charset="-120"/>
               </a:rPr>
-              <a:t>1</a:t>
+              <a:t>3</a:t>
             </a:r>
             <a:endParaRPr lang="en-US" sz="1000" dirty="0"/>
           </a:p>
@@ -17019,148 +17008,6 @@
       <p:sp>
         <p:nvSpPr>
           <p:cNvPr id="46" name="Shape 44"/>
-          <p:cNvSpPr/>
-          <p:nvPr/>
-        </p:nvSpPr>
-        <p:spPr>
-          <a:xfrm>
-            <a:off x="5943600" y="3579876"/>
-            <a:ext cx="5650992" cy="324612"/>
-          </a:xfrm>
-          <a:prstGeom prst="rect">
-            <a:avLst/>
-          </a:prstGeom>
-          <a:solidFill>
-            <a:srgbClr val="FFFFFF"/>
-          </a:solidFill>
-          <a:ln w="9525">
-            <a:solidFill>
-              <a:srgbClr val="E2E8E9"/>
-            </a:solidFill>
-            <a:prstDash val="solid"/>
-          </a:ln>
-        </p:spPr>
-      </p:sp>
-      <p:sp>
-        <p:nvSpPr>
-          <p:cNvPr id="47" name="Text 45"/>
-          <p:cNvSpPr/>
-          <p:nvPr/>
-        </p:nvSpPr>
-        <p:spPr>
-          <a:xfrm>
-            <a:off x="6053328" y="3579876"/>
-            <a:ext cx="2760158" cy="324612"/>
-          </a:xfrm>
-          <a:prstGeom prst="rect">
-            <a:avLst/>
-          </a:prstGeom>
-          <a:noFill/>
-          <a:ln/>
-        </p:spPr>
-        <p:txBody>
-          <a:bodyPr wrap="square" lIns="0" tIns="0" rIns="0" bIns="0" rtlCol="0" anchor="ctr"/>
-          <a:lstStyle/>
-          <a:p>
-            <a:pPr algn="l" indent="0" marL="0">
-              <a:buNone/>
-            </a:pPr>
-            <a:r>
-              <a:rPr lang="en-US" sz="1000" dirty="0">
-                <a:solidFill>
-                  <a:srgbClr val="12303C"/>
-                </a:solidFill>
-                <a:latin typeface="Calibri" pitchFamily="34" charset="0"/>
-                <a:ea typeface="Calibri" pitchFamily="34" charset="-122"/>
-                <a:cs typeface="Calibri" pitchFamily="34" charset="-120"/>
-              </a:rPr>
-              <a:t>5130 Trombley — Newport, MI</a:t>
-            </a:r>
-            <a:endParaRPr lang="en-US" sz="1000" dirty="0"/>
-          </a:p>
-        </p:txBody>
-      </p:sp>
-      <p:sp>
-        <p:nvSpPr>
-          <p:cNvPr id="48" name="Text 46"/>
-          <p:cNvSpPr/>
-          <p:nvPr/>
-        </p:nvSpPr>
-        <p:spPr>
-          <a:xfrm>
-            <a:off x="9032942" y="3579876"/>
-            <a:ext cx="1321724" cy="324612"/>
-          </a:xfrm>
-          <a:prstGeom prst="rect">
-            <a:avLst/>
-          </a:prstGeom>
-          <a:noFill/>
-          <a:ln/>
-        </p:spPr>
-        <p:txBody>
-          <a:bodyPr wrap="square" lIns="0" tIns="0" rIns="0" bIns="0" rtlCol="0" anchor="ctr"/>
-          <a:lstStyle/>
-          <a:p>
-            <a:pPr algn="r" indent="0" marL="0">
-              <a:buNone/>
-            </a:pPr>
-            <a:r>
-              <a:rPr lang="en-US" sz="1000" dirty="0">
-                <a:solidFill>
-                  <a:srgbClr val="47606B"/>
-                </a:solidFill>
-                <a:latin typeface="Calibri" pitchFamily="34" charset="0"/>
-                <a:ea typeface="Calibri" pitchFamily="34" charset="-122"/>
-                <a:cs typeface="Calibri" pitchFamily="34" charset="-120"/>
-              </a:rPr>
-              <a:t>Custom home</a:t>
-            </a:r>
-            <a:endParaRPr lang="en-US" sz="1000" dirty="0"/>
-          </a:p>
-        </p:txBody>
-      </p:sp>
-      <p:sp>
-        <p:nvSpPr>
-          <p:cNvPr id="49" name="Text 47"/>
-          <p:cNvSpPr/>
-          <p:nvPr/>
-        </p:nvSpPr>
-        <p:spPr>
-          <a:xfrm>
-            <a:off x="10574122" y="3579876"/>
-            <a:ext cx="910742" cy="324612"/>
-          </a:xfrm>
-          <a:prstGeom prst="rect">
-            <a:avLst/>
-          </a:prstGeom>
-          <a:noFill/>
-          <a:ln/>
-        </p:spPr>
-        <p:txBody>
-          <a:bodyPr wrap="square" lIns="0" tIns="0" rIns="0" bIns="0" rtlCol="0" anchor="ctr"/>
-          <a:lstStyle/>
-          <a:p>
-            <a:pPr algn="r" indent="0" marL="0">
-              <a:buNone/>
-            </a:pPr>
-            <a:r>
-              <a:rPr lang="en-US" sz="1000" dirty="0">
-                <a:solidFill>
-                  <a:srgbClr val="47606B"/>
-                </a:solidFill>
-                <a:latin typeface="Calibri" pitchFamily="34" charset="0"/>
-                <a:ea typeface="Calibri" pitchFamily="34" charset="-122"/>
-                <a:cs typeface="Calibri" pitchFamily="34" charset="-120"/>
-              </a:rPr>
-              <a:t>1</a:t>
-            </a:r>
-            <a:endParaRPr lang="en-US" sz="1000" dirty="0"/>
-          </a:p>
-        </p:txBody>
-      </p:sp>
-      <p:sp>
-        <p:nvSpPr>
-          <p:cNvPr id="50" name="Shape 48"/>
           <p:cNvSpPr/>
           <p:nvPr/>
         </p:nvSpPr>
@@ -17185,14 +17032,14 @@
       </p:sp>
       <p:sp>
         <p:nvSpPr>
-          <p:cNvPr id="51" name="Text 49"/>
+          <p:cNvPr id="47" name="Text 45"/>
           <p:cNvSpPr/>
           <p:nvPr/>
         </p:nvSpPr>
         <p:spPr>
           <a:xfrm>
             <a:off x="6053328" y="3904488"/>
-            <a:ext cx="2760158" cy="324612"/>
+            <a:ext cx="3024632" cy="324612"/>
           </a:xfrm>
           <a:prstGeom prst="rect">
             <a:avLst/>
@@ -17216,7 +17063,7 @@
                 <a:ea typeface="Calibri" pitchFamily="34" charset="-122"/>
                 <a:cs typeface="Calibri" pitchFamily="34" charset="-120"/>
               </a:rPr>
-              <a:t>Total in development</a:t>
+              <a:t>Total delivered</a:t>
             </a:r>
             <a:endParaRPr lang="en-US" sz="1000" dirty="0"/>
           </a:p>
@@ -17224,14 +17071,14 @@
       </p:sp>
       <p:sp>
         <p:nvSpPr>
-          <p:cNvPr id="52" name="Text 50"/>
-          <p:cNvSpPr/>
-          <p:nvPr/>
-        </p:nvSpPr>
-        <p:spPr>
-          <a:xfrm>
-            <a:off x="9032942" y="3904488"/>
-            <a:ext cx="1321724" cy="324612"/>
+          <p:cNvPr id="48" name="Text 46"/>
+          <p:cNvSpPr/>
+          <p:nvPr/>
+        </p:nvSpPr>
+        <p:spPr>
+          <a:xfrm>
+            <a:off x="9297416" y="3904488"/>
+            <a:ext cx="1193292" cy="324612"/>
           </a:xfrm>
           <a:prstGeom prst="rect">
             <a:avLst/>
@@ -17263,14 +17110,14 @@
       </p:sp>
       <p:sp>
         <p:nvSpPr>
-          <p:cNvPr id="53" name="Text 51"/>
-          <p:cNvSpPr/>
-          <p:nvPr/>
-        </p:nvSpPr>
-        <p:spPr>
-          <a:xfrm>
-            <a:off x="10574122" y="3904488"/>
-            <a:ext cx="910742" cy="324612"/>
+          <p:cNvPr id="49" name="Text 47"/>
+          <p:cNvSpPr/>
+          <p:nvPr/>
+        </p:nvSpPr>
+        <p:spPr>
+          <a:xfrm>
+            <a:off x="10710164" y="3904488"/>
+            <a:ext cx="774700" cy="324612"/>
           </a:xfrm>
           <a:prstGeom prst="rect">
             <a:avLst/>
@@ -17294,7 +17141,7 @@
                 <a:ea typeface="Calibri" pitchFamily="34" charset="-122"/>
                 <a:cs typeface="Calibri" pitchFamily="34" charset="-120"/>
               </a:rPr>
-              <a:t>47</a:t>
+              <a:t>80</a:t>
             </a:r>
             <a:endParaRPr lang="en-US" sz="1000" dirty="0"/>
           </a:p>
@@ -17302,7 +17149,7 @@
       </p:sp>
       <p:sp>
         <p:nvSpPr>
-          <p:cNvPr id="54" name="Text 52"/>
+          <p:cNvPr id="50" name="Text 48"/>
           <p:cNvSpPr/>
           <p:nvPr/>
         </p:nvSpPr>
@@ -17336,7 +17183,7 @@
                 <a:ea typeface="Calibri" pitchFamily="34" charset="-122"/>
                 <a:cs typeface="Calibri" pitchFamily="34" charset="-120"/>
               </a:rPr>
-              <a:t>Source: Bondy Construction &amp; Design real-estate-owned and experience schedule, 21 March 2026. Banking reference: First Merchants Bank has financed $10M+ of Bondy projects since 2019, with all obligations met per terms — reference letter available on request.</a:t>
+              <a:t>Source: Bondy Construction &amp; Design firm profile, July 2026. Banking reference: First Merchants Bank has financed $10M+ of Bondy projects since 2019, with all obligations met per terms — reference letter available on request.</a:t>
             </a:r>
             <a:endParaRPr lang="en-US" sz="850" dirty="0"/>
           </a:p>
@@ -17344,7 +17191,7 @@
       </p:sp>
       <p:sp>
         <p:nvSpPr>
-          <p:cNvPr id="55" name="Text 53"/>
+          <p:cNvPr id="51" name="Text 49"/>
           <p:cNvSpPr/>
           <p:nvPr/>
         </p:nvSpPr>
@@ -17383,7 +17230,7 @@
       </p:sp>
       <p:sp>
         <p:nvSpPr>
-          <p:cNvPr id="56" name="Text 54"/>
+          <p:cNvPr id="52" name="Text 50"/>
           <p:cNvSpPr/>
           <p:nvPr/>
         </p:nvSpPr>

--- a/deck/3331-Trumbull-Investor-Deck-Aug-2026.pptx
+++ b/deck/3331-Trumbull-Investor-Deck-Aug-2026.pptx
@@ -5966,7 +5966,7 @@
                 <a:ea typeface="Calibri" pitchFamily="34" charset="-122"/>
                 <a:cs typeface="Calibri" pitchFamily="34" charset="-120"/>
               </a:rPr>
-              <a:t>Funded by a First Merchants construction loan alongside the $700,000 investor note tranche</a:t>
+              <a:t>Funded by a First Merchants construction loan — secured at 6% — alongside the $700,000 investor note tranche</a:t>
             </a:r>
             <a:endParaRPr lang="en-US" sz="1050" dirty="0"/>
           </a:p>
@@ -8483,7 +8483,7 @@
                 <a:ea typeface="Calibri" pitchFamily="34" charset="-122"/>
                 <a:cs typeface="Calibri" pitchFamily="34" charset="-120"/>
               </a:rPr>
-              <a:t>First Merchants Bank</a:t>
+              <a:t>First Merchants Bank · secured at 6%</a:t>
             </a:r>
             <a:endParaRPr lang="en-US" sz="950" dirty="0"/>
           </a:p>
@@ -11942,7 +11942,7 @@
         </p:nvSpPr>
         <p:spPr>
           <a:xfrm>
-            <a:off x="566928" y="1591056"/>
+            <a:off x="566928" y="1536192"/>
             <a:ext cx="6492240" cy="292608"/>
           </a:xfrm>
           <a:prstGeom prst="rect">
@@ -11967,7 +11967,7 @@
         </p:nvSpPr>
         <p:spPr>
           <a:xfrm>
-            <a:off x="676656" y="1591056"/>
+            <a:off x="676656" y="1536192"/>
             <a:ext cx="4296885" cy="292608"/>
           </a:xfrm>
           <a:prstGeom prst="rect">
@@ -12006,7 +12006,7 @@
         </p:nvSpPr>
         <p:spPr>
           <a:xfrm>
-            <a:off x="5192997" y="1591056"/>
+            <a:off x="5192997" y="1536192"/>
             <a:ext cx="1756443" cy="292608"/>
           </a:xfrm>
           <a:prstGeom prst="rect">
@@ -12045,8 +12045,8 @@
         </p:nvSpPr>
         <p:spPr>
           <a:xfrm>
-            <a:off x="566928" y="1883664"/>
-            <a:ext cx="6492240" cy="384048"/>
+            <a:off x="566928" y="1828800"/>
+            <a:ext cx="6492240" cy="365760"/>
           </a:xfrm>
           <a:prstGeom prst="rect">
             <a:avLst/>
@@ -12070,8 +12070,8 @@
         </p:nvSpPr>
         <p:spPr>
           <a:xfrm>
-            <a:off x="676656" y="1883664"/>
-            <a:ext cx="4296885" cy="384048"/>
+            <a:off x="676656" y="1828800"/>
+            <a:ext cx="4296885" cy="365760"/>
           </a:xfrm>
           <a:prstGeom prst="rect">
             <a:avLst/>
@@ -12109,8 +12109,8 @@
         </p:nvSpPr>
         <p:spPr>
           <a:xfrm>
-            <a:off x="5192997" y="1883664"/>
-            <a:ext cx="1756443" cy="384048"/>
+            <a:off x="5192997" y="1828800"/>
+            <a:ext cx="1756443" cy="365760"/>
           </a:xfrm>
           <a:prstGeom prst="rect">
             <a:avLst/>
@@ -12148,8 +12148,8 @@
         </p:nvSpPr>
         <p:spPr>
           <a:xfrm>
-            <a:off x="566928" y="2267712"/>
-            <a:ext cx="6492240" cy="384048"/>
+            <a:off x="566928" y="2194560"/>
+            <a:ext cx="6492240" cy="365760"/>
           </a:xfrm>
           <a:prstGeom prst="rect">
             <a:avLst/>
@@ -12173,8 +12173,8 @@
         </p:nvSpPr>
         <p:spPr>
           <a:xfrm>
-            <a:off x="676656" y="2267712"/>
-            <a:ext cx="4296885" cy="384048"/>
+            <a:off x="676656" y="2194560"/>
+            <a:ext cx="4296885" cy="365760"/>
           </a:xfrm>
           <a:prstGeom prst="rect">
             <a:avLst/>
@@ -12212,8 +12212,8 @@
         </p:nvSpPr>
         <p:spPr>
           <a:xfrm>
-            <a:off x="5192997" y="2267712"/>
-            <a:ext cx="1756443" cy="384048"/>
+            <a:off x="5192997" y="2194560"/>
+            <a:ext cx="1756443" cy="365760"/>
           </a:xfrm>
           <a:prstGeom prst="rect">
             <a:avLst/>
@@ -12251,8 +12251,8 @@
         </p:nvSpPr>
         <p:spPr>
           <a:xfrm>
-            <a:off x="566928" y="2651760"/>
-            <a:ext cx="6492240" cy="384048"/>
+            <a:off x="566928" y="2560320"/>
+            <a:ext cx="6492240" cy="365760"/>
           </a:xfrm>
           <a:prstGeom prst="rect">
             <a:avLst/>
@@ -12276,8 +12276,8 @@
         </p:nvSpPr>
         <p:spPr>
           <a:xfrm>
-            <a:off x="676656" y="2651760"/>
-            <a:ext cx="4296885" cy="384048"/>
+            <a:off x="676656" y="2560320"/>
+            <a:ext cx="4296885" cy="365760"/>
           </a:xfrm>
           <a:prstGeom prst="rect">
             <a:avLst/>
@@ -12315,8 +12315,8 @@
         </p:nvSpPr>
         <p:spPr>
           <a:xfrm>
-            <a:off x="5192997" y="2651760"/>
-            <a:ext cx="1756443" cy="384048"/>
+            <a:off x="5192997" y="2560320"/>
+            <a:ext cx="1756443" cy="365760"/>
           </a:xfrm>
           <a:prstGeom prst="rect">
             <a:avLst/>
@@ -12354,8 +12354,8 @@
         </p:nvSpPr>
         <p:spPr>
           <a:xfrm>
-            <a:off x="566928" y="3035808"/>
-            <a:ext cx="6492240" cy="384048"/>
+            <a:off x="566928" y="2926080"/>
+            <a:ext cx="6492240" cy="365760"/>
           </a:xfrm>
           <a:prstGeom prst="rect">
             <a:avLst/>
@@ -12379,8 +12379,8 @@
         </p:nvSpPr>
         <p:spPr>
           <a:xfrm>
-            <a:off x="676656" y="3035808"/>
-            <a:ext cx="4296885" cy="384048"/>
+            <a:off x="676656" y="2926080"/>
+            <a:ext cx="4296885" cy="365760"/>
           </a:xfrm>
           <a:prstGeom prst="rect">
             <a:avLst/>
@@ -12418,8 +12418,8 @@
         </p:nvSpPr>
         <p:spPr>
           <a:xfrm>
-            <a:off x="5192997" y="3035808"/>
-            <a:ext cx="1756443" cy="384048"/>
+            <a:off x="5192997" y="2926080"/>
+            <a:ext cx="1756443" cy="365760"/>
           </a:xfrm>
           <a:prstGeom prst="rect">
             <a:avLst/>
@@ -12457,8 +12457,8 @@
         </p:nvSpPr>
         <p:spPr>
           <a:xfrm>
-            <a:off x="566928" y="3419856"/>
-            <a:ext cx="6492240" cy="384048"/>
+            <a:off x="566928" y="3291840"/>
+            <a:ext cx="6492240" cy="365760"/>
           </a:xfrm>
           <a:prstGeom prst="rect">
             <a:avLst/>
@@ -12482,8 +12482,8 @@
         </p:nvSpPr>
         <p:spPr>
           <a:xfrm>
-            <a:off x="676656" y="3419856"/>
-            <a:ext cx="4296885" cy="384048"/>
+            <a:off x="676656" y="3291840"/>
+            <a:ext cx="4296885" cy="365760"/>
           </a:xfrm>
           <a:prstGeom prst="rect">
             <a:avLst/>
@@ -12521,8 +12521,8 @@
         </p:nvSpPr>
         <p:spPr>
           <a:xfrm>
-            <a:off x="5192997" y="3419856"/>
-            <a:ext cx="1756443" cy="384048"/>
+            <a:off x="5192997" y="3291840"/>
+            <a:ext cx="1756443" cy="365760"/>
           </a:xfrm>
           <a:prstGeom prst="rect">
             <a:avLst/>
@@ -12560,8 +12560,8 @@
         </p:nvSpPr>
         <p:spPr>
           <a:xfrm>
-            <a:off x="566928" y="3803904"/>
-            <a:ext cx="6492240" cy="384048"/>
+            <a:off x="566928" y="3657600"/>
+            <a:ext cx="6492240" cy="365760"/>
           </a:xfrm>
           <a:prstGeom prst="rect">
             <a:avLst/>
@@ -12585,8 +12585,8 @@
         </p:nvSpPr>
         <p:spPr>
           <a:xfrm>
-            <a:off x="676656" y="3803904"/>
-            <a:ext cx="4296885" cy="384048"/>
+            <a:off x="676656" y="3657600"/>
+            <a:ext cx="4296885" cy="365760"/>
           </a:xfrm>
           <a:prstGeom prst="rect">
             <a:avLst/>
@@ -12624,8 +12624,8 @@
         </p:nvSpPr>
         <p:spPr>
           <a:xfrm>
-            <a:off x="5192997" y="3803904"/>
-            <a:ext cx="1756443" cy="384048"/>
+            <a:off x="5192997" y="3657600"/>
+            <a:ext cx="1756443" cy="365760"/>
           </a:xfrm>
           <a:prstGeom prst="rect">
             <a:avLst/>
@@ -12663,8 +12663,8 @@
         </p:nvSpPr>
         <p:spPr>
           <a:xfrm>
-            <a:off x="566928" y="4187952"/>
-            <a:ext cx="6492240" cy="384048"/>
+            <a:off x="566928" y="4023360"/>
+            <a:ext cx="6492240" cy="365760"/>
           </a:xfrm>
           <a:prstGeom prst="rect">
             <a:avLst/>
@@ -12688,8 +12688,8 @@
         </p:nvSpPr>
         <p:spPr>
           <a:xfrm>
-            <a:off x="676656" y="4187952"/>
-            <a:ext cx="4296885" cy="384048"/>
+            <a:off x="676656" y="4023360"/>
+            <a:ext cx="4296885" cy="365760"/>
           </a:xfrm>
           <a:prstGeom prst="rect">
             <a:avLst/>
@@ -12727,8 +12727,8 @@
         </p:nvSpPr>
         <p:spPr>
           <a:xfrm>
-            <a:off x="5192997" y="4187952"/>
-            <a:ext cx="1756443" cy="384048"/>
+            <a:off x="5192997" y="4023360"/>
+            <a:ext cx="1756443" cy="365760"/>
           </a:xfrm>
           <a:prstGeom prst="rect">
             <a:avLst/>
@@ -12766,7 +12766,7 @@
         </p:nvSpPr>
         <p:spPr>
           <a:xfrm>
-            <a:off x="566928" y="4718304"/>
+            <a:off x="566928" y="4498848"/>
             <a:ext cx="6492240" cy="475488"/>
           </a:xfrm>
           <a:prstGeom prst="rect">
@@ -12808,8 +12808,8 @@
         </p:nvSpPr>
         <p:spPr>
           <a:xfrm>
-            <a:off x="7443216" y="1591056"/>
-            <a:ext cx="2011680" cy="1426464"/>
+            <a:off x="7443216" y="1536192"/>
+            <a:ext cx="2011680" cy="1389888"/>
           </a:xfrm>
           <a:prstGeom prst="rect">
             <a:avLst/>
@@ -12840,7 +12840,7 @@
         </p:nvSpPr>
         <p:spPr>
           <a:xfrm>
-            <a:off x="7644384" y="1773936"/>
+            <a:off x="7644384" y="1719072"/>
             <a:ext cx="82296" cy="82296"/>
           </a:xfrm>
           <a:prstGeom prst="rect">
@@ -12860,7 +12860,7 @@
         </p:nvSpPr>
         <p:spPr>
           <a:xfrm>
-            <a:off x="7644384" y="1883664"/>
+            <a:off x="7644384" y="1828800"/>
             <a:ext cx="1645920" cy="384048"/>
           </a:xfrm>
           <a:prstGeom prst="rect">
@@ -12899,8 +12899,8 @@
         </p:nvSpPr>
         <p:spPr>
           <a:xfrm>
-            <a:off x="7644384" y="2267712"/>
-            <a:ext cx="1645920" cy="658368"/>
+            <a:off x="7644384" y="2212848"/>
+            <a:ext cx="1645920" cy="621792"/>
           </a:xfrm>
           <a:prstGeom prst="rect">
             <a:avLst/>
@@ -12961,8 +12961,8 @@
         </p:nvSpPr>
         <p:spPr>
           <a:xfrm>
-            <a:off x="9582912" y="1591056"/>
-            <a:ext cx="2011680" cy="1426464"/>
+            <a:off x="9582912" y="1536192"/>
+            <a:ext cx="2011680" cy="1389888"/>
           </a:xfrm>
           <a:prstGeom prst="rect">
             <a:avLst/>
@@ -12993,7 +12993,7 @@
         </p:nvSpPr>
         <p:spPr>
           <a:xfrm>
-            <a:off x="9784080" y="1773936"/>
+            <a:off x="9784080" y="1719072"/>
             <a:ext cx="82296" cy="82296"/>
           </a:xfrm>
           <a:prstGeom prst="rect">
@@ -13013,7 +13013,7 @@
         </p:nvSpPr>
         <p:spPr>
           <a:xfrm>
-            <a:off x="9784080" y="1883664"/>
+            <a:off x="9784080" y="1828800"/>
             <a:ext cx="1645920" cy="384048"/>
           </a:xfrm>
           <a:prstGeom prst="rect">
@@ -13052,8 +13052,8 @@
         </p:nvSpPr>
         <p:spPr>
           <a:xfrm>
-            <a:off x="9784080" y="2267712"/>
-            <a:ext cx="1645920" cy="658368"/>
+            <a:off x="9784080" y="2212848"/>
+            <a:ext cx="1645920" cy="621792"/>
           </a:xfrm>
           <a:prstGeom prst="rect">
             <a:avLst/>
@@ -13114,8 +13114,8 @@
         </p:nvSpPr>
         <p:spPr>
           <a:xfrm>
-            <a:off x="7443216" y="3145536"/>
-            <a:ext cx="2011680" cy="1426464"/>
+            <a:off x="7443216" y="3054096"/>
+            <a:ext cx="2011680" cy="1389888"/>
           </a:xfrm>
           <a:prstGeom prst="rect">
             <a:avLst/>
@@ -13146,7 +13146,7 @@
         </p:nvSpPr>
         <p:spPr>
           <a:xfrm>
-            <a:off x="7644384" y="3328416"/>
+            <a:off x="7644384" y="3236976"/>
             <a:ext cx="82296" cy="82296"/>
           </a:xfrm>
           <a:prstGeom prst="rect">
@@ -13166,7 +13166,7 @@
         </p:nvSpPr>
         <p:spPr>
           <a:xfrm>
-            <a:off x="7644384" y="3438144"/>
+            <a:off x="7644384" y="3346704"/>
             <a:ext cx="1645920" cy="384048"/>
           </a:xfrm>
           <a:prstGeom prst="rect">
@@ -13205,8 +13205,8 @@
         </p:nvSpPr>
         <p:spPr>
           <a:xfrm>
-            <a:off x="7644384" y="3822192"/>
-            <a:ext cx="1645920" cy="658368"/>
+            <a:off x="7644384" y="3730752"/>
+            <a:ext cx="1645920" cy="621792"/>
           </a:xfrm>
           <a:prstGeom prst="rect">
             <a:avLst/>
@@ -13267,8 +13267,8 @@
         </p:nvSpPr>
         <p:spPr>
           <a:xfrm>
-            <a:off x="9582912" y="3145536"/>
-            <a:ext cx="2011680" cy="1426464"/>
+            <a:off x="9582912" y="3054096"/>
+            <a:ext cx="2011680" cy="1389888"/>
           </a:xfrm>
           <a:prstGeom prst="rect">
             <a:avLst/>
@@ -13299,7 +13299,7 @@
         </p:nvSpPr>
         <p:spPr>
           <a:xfrm>
-            <a:off x="9784080" y="3328416"/>
+            <a:off x="9784080" y="3236976"/>
             <a:ext cx="82296" cy="82296"/>
           </a:xfrm>
           <a:prstGeom prst="rect">
@@ -13319,7 +13319,7 @@
         </p:nvSpPr>
         <p:spPr>
           <a:xfrm>
-            <a:off x="9784080" y="3438144"/>
+            <a:off x="9784080" y="3346704"/>
             <a:ext cx="1645920" cy="384048"/>
           </a:xfrm>
           <a:prstGeom prst="rect">
@@ -13358,8 +13358,8 @@
         </p:nvSpPr>
         <p:spPr>
           <a:xfrm>
-            <a:off x="9784080" y="3822192"/>
-            <a:ext cx="1645920" cy="658368"/>
+            <a:off x="9784080" y="3730752"/>
+            <a:ext cx="1645920" cy="621792"/>
           </a:xfrm>
           <a:prstGeom prst="rect">
             <a:avLst/>
@@ -13414,7 +13414,276 @@
       </p:sp>
       <p:sp>
         <p:nvSpPr>
-          <p:cNvPr id="46" name="Text 44"/>
+          <p:cNvPr id="46" name="Shape 44"/>
+          <p:cNvSpPr/>
+          <p:nvPr/>
+        </p:nvSpPr>
+        <p:spPr>
+          <a:xfrm>
+            <a:off x="566928" y="5102352"/>
+            <a:ext cx="11045952" cy="1060704"/>
+          </a:xfrm>
+          <a:prstGeom prst="rect">
+            <a:avLst/>
+          </a:prstGeom>
+          <a:solidFill>
+            <a:srgbClr val="12303C"/>
+          </a:solidFill>
+          <a:ln w="15875">
+            <a:solidFill>
+              <a:srgbClr val="D9A441"/>
+            </a:solidFill>
+            <a:prstDash val="solid"/>
+          </a:ln>
+        </p:spPr>
+      </p:sp>
+      <p:sp>
+        <p:nvSpPr>
+          <p:cNvPr id="47" name="Text 45"/>
+          <p:cNvSpPr/>
+          <p:nvPr/>
+        </p:nvSpPr>
+        <p:spPr>
+          <a:xfrm>
+            <a:off x="877824" y="5266944"/>
+            <a:ext cx="1371600" cy="438912"/>
+          </a:xfrm>
+          <a:prstGeom prst="rect">
+            <a:avLst/>
+          </a:prstGeom>
+          <a:noFill/>
+          <a:ln/>
+        </p:spPr>
+        <p:txBody>
+          <a:bodyPr wrap="square" lIns="0" tIns="0" rIns="0" bIns="0" rtlCol="0" anchor="ctr"/>
+          <a:lstStyle/>
+          <a:p>
+            <a:pPr indent="0" marL="0">
+              <a:buNone/>
+            </a:pPr>
+            <a:r>
+              <a:rPr lang="en-US" sz="2900" b="1" dirty="0">
+                <a:solidFill>
+                  <a:srgbClr val="E3C581"/>
+                </a:solidFill>
+                <a:latin typeface="Cambria" pitchFamily="34" charset="0"/>
+                <a:ea typeface="Cambria" pitchFamily="34" charset="-122"/>
+                <a:cs typeface="Cambria" pitchFamily="34" charset="-120"/>
+              </a:rPr>
+              <a:t>6%</a:t>
+            </a:r>
+            <a:endParaRPr lang="en-US" sz="2900" dirty="0"/>
+          </a:p>
+        </p:txBody>
+      </p:sp>
+      <p:sp>
+        <p:nvSpPr>
+          <p:cNvPr id="48" name="Text 46"/>
+          <p:cNvSpPr/>
+          <p:nvPr/>
+        </p:nvSpPr>
+        <p:spPr>
+          <a:xfrm>
+            <a:off x="877824" y="5705856"/>
+            <a:ext cx="1828800" cy="347472"/>
+          </a:xfrm>
+          <a:prstGeom prst="rect">
+            <a:avLst/>
+          </a:prstGeom>
+          <a:noFill/>
+          <a:ln/>
+        </p:spPr>
+        <p:txBody>
+          <a:bodyPr wrap="square" lIns="0" tIns="0" rIns="0" bIns="0" rtlCol="0" anchor="t"/>
+          <a:lstStyle/>
+          <a:p>
+            <a:pPr indent="0" marL="0">
+              <a:lnSpc>
+                <a:spcPts val="1000"/>
+              </a:lnSpc>
+              <a:buNone/>
+            </a:pPr>
+            <a:r>
+              <a:rPr lang="en-US" sz="800" b="1" spc="70" kern="0" dirty="0">
+                <a:solidFill>
+                  <a:srgbClr val="FFFFFF"/>
+                </a:solidFill>
+                <a:latin typeface="Calibri" pitchFamily="34" charset="0"/>
+                <a:ea typeface="Calibri" pitchFamily="34" charset="-122"/>
+                <a:cs typeface="Calibri" pitchFamily="34" charset="-120"/>
+              </a:rPr>
+              <a:t>CONSTRUCTION DEBT</a:t>
+            </a:r>
+            <a:endParaRPr lang="en-US" sz="800" dirty="0"/>
+          </a:p>
+          <a:p>
+            <a:pPr indent="0" marL="0">
+              <a:lnSpc>
+                <a:spcPts val="1000"/>
+              </a:lnSpc>
+              <a:buNone/>
+            </a:pPr>
+            <a:r>
+              <a:rPr lang="en-US" sz="800" b="1" spc="70" kern="0" dirty="0">
+                <a:solidFill>
+                  <a:srgbClr val="FFFFFF"/>
+                </a:solidFill>
+                <a:latin typeface="Calibri" pitchFamily="34" charset="0"/>
+                <a:ea typeface="Calibri" pitchFamily="34" charset="-122"/>
+                <a:cs typeface="Calibri" pitchFamily="34" charset="-120"/>
+              </a:rPr>
+              <a:t>SECURED</a:t>
+            </a:r>
+            <a:endParaRPr lang="en-US" sz="800" dirty="0"/>
+          </a:p>
+        </p:txBody>
+      </p:sp>
+      <p:sp>
+        <p:nvSpPr>
+          <p:cNvPr id="49" name="Text 47"/>
+          <p:cNvSpPr/>
+          <p:nvPr/>
+        </p:nvSpPr>
+        <p:spPr>
+          <a:xfrm>
+            <a:off x="2962656" y="5266944"/>
+            <a:ext cx="1371600" cy="438912"/>
+          </a:xfrm>
+          <a:prstGeom prst="rect">
+            <a:avLst/>
+          </a:prstGeom>
+          <a:noFill/>
+          <a:ln/>
+        </p:spPr>
+        <p:txBody>
+          <a:bodyPr wrap="square" lIns="0" tIns="0" rIns="0" bIns="0" rtlCol="0" anchor="ctr"/>
+          <a:lstStyle/>
+          <a:p>
+            <a:pPr indent="0" marL="0">
+              <a:buNone/>
+            </a:pPr>
+            <a:r>
+              <a:rPr lang="en-US" sz="2900" b="1" dirty="0">
+                <a:solidFill>
+                  <a:srgbClr val="FFFFFF"/>
+                </a:solidFill>
+                <a:latin typeface="Cambria" pitchFamily="34" charset="0"/>
+                <a:ea typeface="Cambria" pitchFamily="34" charset="-122"/>
+                <a:cs typeface="Cambria" pitchFamily="34" charset="-120"/>
+              </a:rPr>
+              <a:t>9%</a:t>
+            </a:r>
+            <a:endParaRPr lang="en-US" sz="2900" dirty="0"/>
+          </a:p>
+        </p:txBody>
+      </p:sp>
+      <p:sp>
+        <p:nvSpPr>
+          <p:cNvPr id="50" name="Text 48"/>
+          <p:cNvSpPr/>
+          <p:nvPr/>
+        </p:nvSpPr>
+        <p:spPr>
+          <a:xfrm>
+            <a:off x="2962656" y="5705856"/>
+            <a:ext cx="1828800" cy="347472"/>
+          </a:xfrm>
+          <a:prstGeom prst="rect">
+            <a:avLst/>
+          </a:prstGeom>
+          <a:noFill/>
+          <a:ln/>
+        </p:spPr>
+        <p:txBody>
+          <a:bodyPr wrap="square" lIns="0" tIns="0" rIns="0" bIns="0" rtlCol="0" anchor="t"/>
+          <a:lstStyle/>
+          <a:p>
+            <a:pPr indent="0" marL="0">
+              <a:lnSpc>
+                <a:spcPts val="1000"/>
+              </a:lnSpc>
+              <a:buNone/>
+            </a:pPr>
+            <a:r>
+              <a:rPr lang="en-US" sz="800" b="1" spc="70" kern="0" dirty="0">
+                <a:solidFill>
+                  <a:srgbClr val="9FC0C8"/>
+                </a:solidFill>
+                <a:latin typeface="Calibri" pitchFamily="34" charset="0"/>
+                <a:ea typeface="Calibri" pitchFamily="34" charset="-122"/>
+                <a:cs typeface="Calibri" pitchFamily="34" charset="-120"/>
+              </a:rPr>
+              <a:t>CARRIED IN THE</a:t>
+            </a:r>
+            <a:endParaRPr lang="en-US" sz="800" dirty="0"/>
+          </a:p>
+          <a:p>
+            <a:pPr indent="0" marL="0">
+              <a:lnSpc>
+                <a:spcPts val="1000"/>
+              </a:lnSpc>
+              <a:buNone/>
+            </a:pPr>
+            <a:r>
+              <a:rPr lang="en-US" sz="800" b="1" spc="70" kern="0" dirty="0">
+                <a:solidFill>
+                  <a:srgbClr val="9FC0C8"/>
+                </a:solidFill>
+                <a:latin typeface="Calibri" pitchFamily="34" charset="0"/>
+                <a:ea typeface="Calibri" pitchFamily="34" charset="-122"/>
+                <a:cs typeface="Calibri" pitchFamily="34" charset="-120"/>
+              </a:rPr>
+              <a:t>PROFORMA ABOVE</a:t>
+            </a:r>
+            <a:endParaRPr lang="en-US" sz="800" dirty="0"/>
+          </a:p>
+        </p:txBody>
+      </p:sp>
+      <p:sp>
+        <p:nvSpPr>
+          <p:cNvPr id="51" name="Text 49"/>
+          <p:cNvSpPr/>
+          <p:nvPr/>
+        </p:nvSpPr>
+        <p:spPr>
+          <a:xfrm>
+            <a:off x="5047488" y="5285232"/>
+            <a:ext cx="6309360" cy="731520"/>
+          </a:xfrm>
+          <a:prstGeom prst="rect">
+            <a:avLst/>
+          </a:prstGeom>
+          <a:noFill/>
+          <a:ln/>
+        </p:spPr>
+        <p:txBody>
+          <a:bodyPr wrap="square" lIns="0" tIns="0" rIns="0" bIns="0" rtlCol="0" anchor="ctr"/>
+          <a:lstStyle/>
+          <a:p>
+            <a:pPr indent="0" marL="0">
+              <a:lnSpc>
+                <a:spcPts val="1400"/>
+              </a:lnSpc>
+              <a:buNone/>
+            </a:pPr>
+            <a:r>
+              <a:rPr lang="en-US" sz="1050" dirty="0">
+                <a:solidFill>
+                  <a:srgbClr val="C6DADE"/>
+                </a:solidFill>
+                <a:latin typeface="Calibri" pitchFamily="34" charset="0"/>
+                <a:ea typeface="Calibri" pitchFamily="34" charset="-122"/>
+                <a:cs typeface="Calibri" pitchFamily="34" charset="-120"/>
+              </a:rPr>
+              <a:t>The construction loan is secured at 6%. Every figure above is underwritten at 9%, with construction overage allowances carried in the budget — so the projected margin is modeled three points above the debt cost actually in hand, before any of that cushion is counted.</a:t>
+            </a:r>
+            <a:endParaRPr lang="en-US" sz="1050" dirty="0"/>
+          </a:p>
+        </p:txBody>
+      </p:sp>
+      <p:sp>
+        <p:nvSpPr>
+          <p:cNvPr id="52" name="Text 50"/>
           <p:cNvSpPr/>
           <p:nvPr/>
         </p:nvSpPr>
@@ -13453,7 +13722,7 @@
       </p:sp>
       <p:sp>
         <p:nvSpPr>
-          <p:cNvPr id="47" name="Text 45"/>
+          <p:cNvPr id="53" name="Text 51"/>
           <p:cNvSpPr/>
           <p:nvPr/>
         </p:nvSpPr>

--- a/deck/3331-Trumbull-Investor-Deck-Aug-2026.pptx
+++ b/deck/3331-Trumbull-Investor-Deck-Aug-2026.pptx
@@ -4495,7 +4495,7 @@
         </p:nvSpPr>
         <p:spPr>
           <a:xfrm>
-            <a:off x="566928" y="5376672"/>
+            <a:off x="566928" y="5340096"/>
             <a:ext cx="5394960" cy="256032"/>
           </a:xfrm>
           <a:prstGeom prst="rect">
@@ -4520,7 +4520,7 @@
                 <a:ea typeface="Calibri" pitchFamily="34" charset="-122"/>
                 <a:cs typeface="Calibri" pitchFamily="34" charset="-120"/>
               </a:rPr>
-              <a:t>Kevin Simpson  ·  AK Capital Investments LLC</a:t>
+              <a:t>Kevin Simpson  ·  Co-Developer &amp; Investor Relations</a:t>
             </a:r>
             <a:endParaRPr lang="en-US" sz="1200" dirty="0"/>
           </a:p>
@@ -4534,7 +4534,46 @@
         </p:nvSpPr>
         <p:spPr>
           <a:xfrm>
-            <a:off x="566928" y="5632704"/>
+            <a:off x="566928" y="5577840"/>
+            <a:ext cx="5394960" cy="219456"/>
+          </a:xfrm>
+          <a:prstGeom prst="rect">
+            <a:avLst/>
+          </a:prstGeom>
+          <a:noFill/>
+          <a:ln/>
+        </p:spPr>
+        <p:txBody>
+          <a:bodyPr wrap="square" lIns="0" tIns="0" rIns="0" bIns="0" rtlCol="0" anchor="ctr"/>
+          <a:lstStyle/>
+          <a:p>
+            <a:pPr indent="0" marL="0">
+              <a:buNone/>
+            </a:pPr>
+            <a:r>
+              <a:rPr lang="en-US" sz="1050" dirty="0">
+                <a:solidFill>
+                  <a:srgbClr val="9FC0C8"/>
+                </a:solidFill>
+                <a:latin typeface="Calibri" pitchFamily="34" charset="0"/>
+                <a:ea typeface="Calibri" pitchFamily="34" charset="-122"/>
+                <a:cs typeface="Calibri" pitchFamily="34" charset="-120"/>
+              </a:rPr>
+              <a:t>AK Capital Investments LLC</a:t>
+            </a:r>
+            <a:endParaRPr lang="en-US" sz="1050" dirty="0"/>
+          </a:p>
+        </p:txBody>
+      </p:sp>
+      <p:sp>
+        <p:nvSpPr>
+          <p:cNvPr id="20" name="Text 17"/>
+          <p:cNvSpPr/>
+          <p:nvPr/>
+        </p:nvSpPr>
+        <p:spPr>
+          <a:xfrm>
+            <a:off x="566928" y="5815584"/>
             <a:ext cx="5394960" cy="237744"/>
           </a:xfrm>
           <a:prstGeom prst="rect">
@@ -4567,14 +4606,14 @@
       </p:sp>
       <p:sp>
         <p:nvSpPr>
-          <p:cNvPr id="20" name="Text 17"/>
-          <p:cNvSpPr/>
-          <p:nvPr/>
-        </p:nvSpPr>
-        <p:spPr>
-          <a:xfrm>
-            <a:off x="566928" y="5961888"/>
-            <a:ext cx="5394960" cy="694944"/>
+          <p:cNvPr id="21" name="Text 18"/>
+          <p:cNvSpPr/>
+          <p:nvPr/>
+        </p:nvSpPr>
+        <p:spPr>
+          <a:xfrm>
+            <a:off x="566928" y="6126480"/>
+            <a:ext cx="5394960" cy="603504"/>
           </a:xfrm>
           <a:prstGeom prst="rect">
             <a:avLst/>
@@ -4593,7 +4632,7 @@
               <a:buNone/>
             </a:pPr>
             <a:r>
-              <a:rPr lang="en-US" sz="700" dirty="0">
+              <a:rPr lang="en-US" sz="650" dirty="0">
                 <a:solidFill>
                   <a:srgbClr val="5B7F8A"/>
                 </a:solidFill>
@@ -4603,7 +4642,7 @@
               </a:rPr>
               <a:t>This overview is a summary for discussion purposes only and is not an offer to sell or a solicitation of an offer to buy any security. Any offering is made only to accredited investors through definitive documents. Figures reflect launch pricing, third-party sold records, the Bondy Construction &amp; Design real-estate-owned schedule dated 21 March 2026, and the June 2026 proforma; all figures should be independently verified. Real estate investments involve risk, including loss of principal. Past performance of prior projects does not guarantee future results.</a:t>
             </a:r>
-            <a:endParaRPr lang="en-US" sz="700" dirty="0"/>
+            <a:endParaRPr lang="en-US" sz="650" dirty="0"/>
           </a:p>
         </p:txBody>
       </p:sp>
@@ -15797,7 +15836,7 @@
                 <a:ea typeface="Calibri" pitchFamily="34" charset="-122"/>
                 <a:cs typeface="Calibri" pitchFamily="34" charset="-120"/>
               </a:rPr>
-              <a:t>Kevin Simpson — AK Capital Investments, Investor Relations
+              <a:t>Kevin Simpson — Co-Developer &amp; Investor Relations, AK Capital Investments
 </a:t>
             </a:r>
             <a:pPr indent="0" marL="0">

--- a/deck/3331-Trumbull-Investor-Deck-Aug-2026.pptx
+++ b/deck/3331-Trumbull-Investor-Deck-Aug-2026.pptx
@@ -2148,7 +2148,7 @@
                 <a:ea typeface="Calibri" pitchFamily="34" charset="-122"/>
                 <a:cs typeface="Calibri" pitchFamily="34" charset="-120"/>
               </a:rPr>
-              <a:t>PHASE 1 NOTE TRANCHE</a:t>
+              <a:t>PHASE 1 DEBT RAISE</a:t>
             </a:r>
             <a:endParaRPr lang="en-US" sz="780" dirty="0"/>
           </a:p>
@@ -2263,7 +2263,7 @@
         </p:nvSpPr>
         <p:spPr>
           <a:xfrm>
-            <a:off x="566928" y="4901184"/>
+            <a:off x="566928" y="4882896"/>
             <a:ext cx="4937760" cy="256032"/>
           </a:xfrm>
           <a:prstGeom prst="rect">
@@ -2288,7 +2288,7 @@
                 <a:ea typeface="Calibri" pitchFamily="34" charset="-122"/>
                 <a:cs typeface="Calibri" pitchFamily="34" charset="-120"/>
               </a:rPr>
-              <a:t>SECURED NOTE OFFERING   ·   AUGUST 2026</a:t>
+              <a:t>DEBT INVESTMENT  ·  SECURED PROMISSORY NOTE</a:t>
             </a:r>
             <a:endParaRPr lang="en-US" sz="1000" dirty="0"/>
           </a:p>
@@ -2302,7 +2302,46 @@
         </p:nvSpPr>
         <p:spPr>
           <a:xfrm>
-            <a:off x="566928" y="5230368"/>
+            <a:off x="566928" y="5157216"/>
+            <a:ext cx="4937760" cy="219456"/>
+          </a:xfrm>
+          <a:prstGeom prst="rect">
+            <a:avLst/>
+          </a:prstGeom>
+          <a:noFill/>
+          <a:ln/>
+        </p:spPr>
+        <p:txBody>
+          <a:bodyPr wrap="square" lIns="0" tIns="0" rIns="0" bIns="0" rtlCol="0" anchor="ctr"/>
+          <a:lstStyle/>
+          <a:p>
+            <a:pPr indent="0" marL="0">
+              <a:buNone/>
+            </a:pPr>
+            <a:r>
+              <a:rPr lang="en-US" sz="950" spc="140" kern="0" dirty="0">
+                <a:solidFill>
+                  <a:srgbClr val="9FC0C8"/>
+                </a:solidFill>
+                <a:latin typeface="Calibri" pitchFamily="34" charset="0"/>
+                <a:ea typeface="Calibri" pitchFamily="34" charset="-122"/>
+                <a:cs typeface="Calibri" pitchFamily="34" charset="-120"/>
+              </a:rPr>
+              <a:t>AUGUST 2026</a:t>
+            </a:r>
+            <a:endParaRPr lang="en-US" sz="950" dirty="0"/>
+          </a:p>
+        </p:txBody>
+      </p:sp>
+      <p:sp>
+        <p:nvSpPr>
+          <p:cNvPr id="19" name="Text 16"/>
+          <p:cNvSpPr/>
+          <p:nvPr/>
+        </p:nvSpPr>
+        <p:spPr>
+          <a:xfrm>
+            <a:off x="566928" y="5468112"/>
             <a:ext cx="4937760" cy="457200"/>
           </a:xfrm>
           <a:prstGeom prst="rect">
@@ -2330,7 +2369,7 @@
                 <a:ea typeface="Calibri" pitchFamily="34" charset="-122"/>
                 <a:cs typeface="Calibri" pitchFamily="34" charset="-120"/>
               </a:rPr>
-              <a:t>Confidential — prepared for the named recipient only. Not an offer to sell securities.</a:t>
+              <a:t>Debt only — no equity is offered. Confidential, prepared for the named recipient only. Not an offer to sell securities.</a:t>
             </a:r>
             <a:endParaRPr lang="en-US" sz="850" dirty="0"/>
           </a:p>
@@ -4341,7 +4380,7 @@
                 <a:ea typeface="Calibri" pitchFamily="34" charset="-122"/>
                 <a:cs typeface="Calibri" pitchFamily="34" charset="-120"/>
               </a:rPr>
-              <a:t>Note terms, comp book, CD set, and the June 2026 proforma.</a:t>
+              <a:t>Promissory note, personal guarantee, comp book, CD set, and the June 2026 proforma.</a:t>
             </a:r>
             <a:endParaRPr lang="en-US" sz="1050" dirty="0"/>
           </a:p>
@@ -6646,7 +6685,7 @@
                 <a:ea typeface="Calibri" pitchFamily="34" charset="-122"/>
                 <a:cs typeface="Calibri" pitchFamily="34" charset="-120"/>
               </a:rPr>
-              <a:t>THE OFFER</a:t>
+              <a:t>THE DEBT INVESTMENT</a:t>
             </a:r>
             <a:endParaRPr lang="en-US" sz="1050" dirty="0"/>
           </a:p>
@@ -8345,7 +8384,7 @@
                 <a:ea typeface="Calibri" pitchFamily="34" charset="-122"/>
                 <a:cs typeface="Calibri" pitchFamily="34" charset="-120"/>
               </a:rPr>
-              <a:t>Interest is a fixed contractual obligation of the borrower under the promissory note, not a projection. Seven $100,000 notes; accredited investors only.</a:t>
+              <a:t>This is a debt investment, not equity — you are lending to the borrower under a secured promissory note. Interest is a fixed contractual obligation, not a projection and not a share of profits; there is no upside beyond the stated rate. Seven $100,000 notes, accredited investors only.</a:t>
             </a:r>
             <a:endParaRPr lang="en-US" sz="850" dirty="0"/>
           </a:p>
@@ -11438,7 +11477,7 @@
                 <a:ea typeface="Calibri" pitchFamily="34" charset="-122"/>
                 <a:cs typeface="Calibri" pitchFamily="34" charset="-120"/>
               </a:rPr>
-              <a:t>Sources: Realcomp IDX sold records (June–July 2026 pulls), ALTA seller settlement statements, and builder price lists, per Bondy Construction &amp; Design. Full comp book with unit-level closings is in the offering package. All figures should be independently verified.</a:t>
+              <a:t>Sources: Realcomp IDX sold records (June–July 2026 pulls), ALTA seller settlement statements, and builder price lists, per Bondy Construction &amp; Design. Full comp book with unit-level closings is in the diligence package. All figures should be independently verified.</a:t>
             </a:r>
             <a:endParaRPr lang="en-US" sz="850" dirty="0"/>
           </a:p>

--- a/deck/3331-Trumbull-Investor-Deck-Aug-2026.pptx
+++ b/deck/3331-Trumbull-Investor-Deck-Aug-2026.pptx
@@ -1767,7 +1767,7 @@
       </p:grpSpPr>
       <p:pic>
         <p:nvPicPr>
-          <p:cNvPr id="2" name="Image 0" descr="/home/user/3331-trumbull/deck/img/rendering-aerial.jpg">    </p:cNvPr>
+          <p:cNvPr id="2" name="Image 0" descr="/home/user/3331-trumbull/deck/img/hero-aerial.jpg">    </p:cNvPr>
           <p:cNvPicPr>
             <a:picLocks noChangeAspect="1"/>
           </p:cNvPicPr>
@@ -1775,13 +1775,14 @@
         </p:nvPicPr>
         <p:blipFill>
           <a:blip r:embed="rId1"/>
-          <a:srcRect l="0" r="0" t="0" b="0"/>
-          <a:stretch/>
+          <a:stretch>
+            <a:fillRect/>
+          </a:stretch>
         </p:blipFill>
         <p:spPr>
           <a:xfrm>
-            <a:off x="6035040" y="0"/>
-            <a:ext cx="6126480" cy="6858000"/>
+            <a:off x="0" y="0"/>
+            <a:ext cx="12161520" cy="6858000"/>
           </a:xfrm>
           <a:prstGeom prst="rect">
             <a:avLst/>
@@ -1796,72 +1797,8 @@
         </p:nvSpPr>
         <p:spPr>
           <a:xfrm>
-            <a:off x="6035040" y="0"/>
-            <a:ext cx="6126480" cy="6858000"/>
-          </a:xfrm>
-          <a:prstGeom prst="rect">
-            <a:avLst/>
-          </a:prstGeom>
-          <a:solidFill>
-            <a:srgbClr val="12303C">
-              <a:alpha val="58000"/>
-            </a:srgbClr>
-          </a:solidFill>
-          <a:ln/>
-        </p:spPr>
-      </p:sp>
-      <p:sp>
-        <p:nvSpPr>
-          <p:cNvPr id="4" name="Shape 1"/>
-          <p:cNvSpPr/>
-          <p:nvPr/>
-        </p:nvSpPr>
-        <p:spPr>
-          <a:xfrm>
-            <a:off x="5486400" y="0"/>
-            <a:ext cx="1097280" cy="6858000"/>
-          </a:xfrm>
-          <a:prstGeom prst="rect">
-            <a:avLst/>
-          </a:prstGeom>
-          <a:solidFill>
-            <a:srgbClr val="12303C">
-              <a:alpha val="70000"/>
-            </a:srgbClr>
-          </a:solidFill>
-          <a:ln/>
-        </p:spPr>
-      </p:sp>
-      <p:sp>
-        <p:nvSpPr>
-          <p:cNvPr id="5" name="Shape 2"/>
-          <p:cNvSpPr/>
-          <p:nvPr/>
-        </p:nvSpPr>
-        <p:spPr>
-          <a:xfrm>
-            <a:off x="0" y="0"/>
-            <a:ext cx="5852160" cy="6858000"/>
-          </a:xfrm>
-          <a:prstGeom prst="rect">
-            <a:avLst/>
-          </a:prstGeom>
-          <a:solidFill>
-            <a:srgbClr val="12303C"/>
-          </a:solidFill>
-          <a:ln/>
-        </p:spPr>
-      </p:sp>
-      <p:sp>
-        <p:nvSpPr>
-          <p:cNvPr id="6" name="Shape 3"/>
-          <p:cNvSpPr/>
-          <p:nvPr/>
-        </p:nvSpPr>
-        <p:spPr>
-          <a:xfrm>
-            <a:off x="566928" y="987552"/>
-            <a:ext cx="118872" cy="118872"/>
+            <a:off x="566928" y="3127248"/>
+            <a:ext cx="100584" cy="100584"/>
           </a:xfrm>
           <a:prstGeom prst="rect">
             <a:avLst/>
@@ -1874,14 +1811,14 @@
       </p:sp>
       <p:sp>
         <p:nvSpPr>
-          <p:cNvPr id="7" name="Text 4"/>
-          <p:cNvSpPr/>
-          <p:nvPr/>
-        </p:nvSpPr>
-        <p:spPr>
-          <a:xfrm>
-            <a:off x="804672" y="914400"/>
-            <a:ext cx="4937760" cy="274320"/>
+          <p:cNvPr id="4" name="Text 1"/>
+          <p:cNvSpPr/>
+          <p:nvPr/>
+        </p:nvSpPr>
+        <p:spPr>
+          <a:xfrm>
+            <a:off x="786384" y="3063240"/>
+            <a:ext cx="5120640" cy="237744"/>
           </a:xfrm>
           <a:prstGeom prst="rect">
             <a:avLst/>
@@ -1913,30 +1850,30 @@
       </p:sp>
       <p:sp>
         <p:nvSpPr>
-          <p:cNvPr id="8" name="Text 5"/>
-          <p:cNvSpPr/>
-          <p:nvPr/>
-        </p:nvSpPr>
-        <p:spPr>
-          <a:xfrm>
-            <a:off x="566928" y="1371600"/>
-            <a:ext cx="5120640" cy="868680"/>
-          </a:xfrm>
-          <a:prstGeom prst="rect">
-            <a:avLst/>
-          </a:prstGeom>
-          <a:noFill/>
-          <a:ln/>
-        </p:spPr>
-        <p:txBody>
-          <a:bodyPr wrap="square" lIns="0" tIns="0" rIns="0" bIns="0" rtlCol="0" anchor="ctr"/>
-          <a:lstStyle/>
-          <a:p>
-            <a:pPr indent="0" marL="0">
-              <a:buNone/>
-            </a:pPr>
-            <a:r>
-              <a:rPr lang="en-US" sz="4200" b="1" dirty="0">
+          <p:cNvPr id="5" name="Text 2"/>
+          <p:cNvSpPr/>
+          <p:nvPr/>
+        </p:nvSpPr>
+        <p:spPr>
+          <a:xfrm>
+            <a:off x="566928" y="3346704"/>
+            <a:ext cx="5303520" cy="731520"/>
+          </a:xfrm>
+          <a:prstGeom prst="rect">
+            <a:avLst/>
+          </a:prstGeom>
+          <a:noFill/>
+          <a:ln/>
+        </p:spPr>
+        <p:txBody>
+          <a:bodyPr wrap="square" lIns="0" tIns="0" rIns="0" bIns="0" rtlCol="0" anchor="ctr"/>
+          <a:lstStyle/>
+          <a:p>
+            <a:pPr indent="0" marL="0">
+              <a:buNone/>
+            </a:pPr>
+            <a:r>
+              <a:rPr lang="en-US" sz="4000" b="1" dirty="0">
                 <a:solidFill>
                   <a:srgbClr val="FFFFFF"/>
                 </a:solidFill>
@@ -1946,20 +1883,20 @@
               </a:rPr>
               <a:t>3331 Trumbull</a:t>
             </a:r>
-            <a:endParaRPr lang="en-US" sz="4200" dirty="0"/>
-          </a:p>
-        </p:txBody>
-      </p:sp>
-      <p:sp>
-        <p:nvSpPr>
-          <p:cNvPr id="9" name="Text 6"/>
-          <p:cNvSpPr/>
-          <p:nvPr/>
-        </p:nvSpPr>
-        <p:spPr>
-          <a:xfrm>
-            <a:off x="566928" y="2286000"/>
-            <a:ext cx="4846320" cy="1005840"/>
+            <a:endParaRPr lang="en-US" sz="4000" dirty="0"/>
+          </a:p>
+        </p:txBody>
+      </p:sp>
+      <p:sp>
+        <p:nvSpPr>
+          <p:cNvPr id="6" name="Text 3"/>
+          <p:cNvSpPr/>
+          <p:nvPr/>
+        </p:nvSpPr>
+        <p:spPr>
+          <a:xfrm>
+            <a:off x="566928" y="4114800"/>
+            <a:ext cx="5120640" cy="603504"/>
           </a:xfrm>
           <a:prstGeom prst="rect">
             <a:avLst/>
@@ -1973,14 +1910,14 @@
           <a:p>
             <a:pPr indent="0" marL="0">
               <a:lnSpc>
-                <a:spcPts val="2100"/>
+                <a:spcPts val="2000"/>
               </a:lnSpc>
               <a:buNone/>
             </a:pPr>
             <a:r>
-              <a:rPr lang="en-US" sz="1400" dirty="0">
-                <a:solidFill>
-                  <a:srgbClr val="C6DADE"/>
+              <a:rPr lang="en-US" sz="1350" dirty="0">
+                <a:solidFill>
+                  <a:srgbClr val="D2E3E7"/>
                 </a:solidFill>
                 <a:latin typeface="Calibri" pitchFamily="34" charset="0"/>
                 <a:ea typeface="Calibri" pitchFamily="34" charset="-122"/>
@@ -1988,36 +1925,36 @@
               </a:rPr>
               <a:t>Twenty-five for-sale townhomes on a full city block in North Corktown, Detroit — built in two phases.</a:t>
             </a:r>
-            <a:endParaRPr lang="en-US" sz="1400" dirty="0"/>
-          </a:p>
-        </p:txBody>
-      </p:sp>
-      <p:sp>
-        <p:nvSpPr>
-          <p:cNvPr id="10" name="Text 7"/>
-          <p:cNvSpPr/>
-          <p:nvPr/>
-        </p:nvSpPr>
-        <p:spPr>
-          <a:xfrm>
-            <a:off x="566928" y="3566160"/>
-            <a:ext cx="1554480" cy="384048"/>
-          </a:xfrm>
-          <a:prstGeom prst="rect">
-            <a:avLst/>
-          </a:prstGeom>
-          <a:noFill/>
-          <a:ln/>
-        </p:spPr>
-        <p:txBody>
-          <a:bodyPr wrap="square" lIns="0" tIns="0" rIns="0" bIns="0" rtlCol="0" anchor="ctr"/>
-          <a:lstStyle/>
-          <a:p>
-            <a:pPr indent="0" marL="0">
-              <a:buNone/>
-            </a:pPr>
-            <a:r>
-              <a:rPr lang="en-US" sz="2100" b="1" dirty="0">
+            <a:endParaRPr lang="en-US" sz="1350" dirty="0"/>
+          </a:p>
+        </p:txBody>
+      </p:sp>
+      <p:sp>
+        <p:nvSpPr>
+          <p:cNvPr id="7" name="Text 4"/>
+          <p:cNvSpPr/>
+          <p:nvPr/>
+        </p:nvSpPr>
+        <p:spPr>
+          <a:xfrm>
+            <a:off x="566928" y="4846320"/>
+            <a:ext cx="1554480" cy="365760"/>
+          </a:xfrm>
+          <a:prstGeom prst="rect">
+            <a:avLst/>
+          </a:prstGeom>
+          <a:noFill/>
+          <a:ln/>
+        </p:spPr>
+        <p:txBody>
+          <a:bodyPr wrap="square" lIns="0" tIns="0" rIns="0" bIns="0" rtlCol="0" anchor="ctr"/>
+          <a:lstStyle/>
+          <a:p>
+            <a:pPr indent="0" marL="0">
+              <a:buNone/>
+            </a:pPr>
+            <a:r>
+              <a:rPr lang="en-US" sz="2000" b="1" dirty="0">
                 <a:solidFill>
                   <a:srgbClr val="FFFFFF"/>
                 </a:solidFill>
@@ -2027,20 +1964,20 @@
               </a:rPr>
               <a:t>13 + 12</a:t>
             </a:r>
-            <a:endParaRPr lang="en-US" sz="2100" dirty="0"/>
-          </a:p>
-        </p:txBody>
-      </p:sp>
-      <p:sp>
-        <p:nvSpPr>
-          <p:cNvPr id="11" name="Text 8"/>
-          <p:cNvSpPr/>
-          <p:nvPr/>
-        </p:nvSpPr>
-        <p:spPr>
-          <a:xfrm>
-            <a:off x="566928" y="3959352"/>
-            <a:ext cx="1554480" cy="457200"/>
+            <a:endParaRPr lang="en-US" sz="2000" dirty="0"/>
+          </a:p>
+        </p:txBody>
+      </p:sp>
+      <p:sp>
+        <p:nvSpPr>
+          <p:cNvPr id="8" name="Text 5"/>
+          <p:cNvSpPr/>
+          <p:nvPr/>
+        </p:nvSpPr>
+        <p:spPr>
+          <a:xfrm>
+            <a:off x="566928" y="5212080"/>
+            <a:ext cx="1554480" cy="274320"/>
           </a:xfrm>
           <a:prstGeom prst="rect">
             <a:avLst/>
@@ -2059,7 +1996,7 @@
               <a:buNone/>
             </a:pPr>
             <a:r>
-              <a:rPr lang="en-US" sz="780" spc="80" kern="0" dirty="0">
+              <a:rPr lang="en-US" sz="760" spc="70" kern="0" dirty="0">
                 <a:solidFill>
                   <a:srgbClr val="9FC0C8"/>
                 </a:solidFill>
@@ -2069,36 +2006,36 @@
               </a:rPr>
               <a:t>UNITS, PHASE 1 / PHASE 2</a:t>
             </a:r>
-            <a:endParaRPr lang="en-US" sz="780" dirty="0"/>
-          </a:p>
-        </p:txBody>
-      </p:sp>
-      <p:sp>
-        <p:nvSpPr>
-          <p:cNvPr id="12" name="Text 9"/>
-          <p:cNvSpPr/>
-          <p:nvPr/>
-        </p:nvSpPr>
-        <p:spPr>
-          <a:xfrm>
-            <a:off x="2194560" y="3566160"/>
-            <a:ext cx="1554480" cy="384048"/>
-          </a:xfrm>
-          <a:prstGeom prst="rect">
-            <a:avLst/>
-          </a:prstGeom>
-          <a:noFill/>
-          <a:ln/>
-        </p:spPr>
-        <p:txBody>
-          <a:bodyPr wrap="square" lIns="0" tIns="0" rIns="0" bIns="0" rtlCol="0" anchor="ctr"/>
-          <a:lstStyle/>
-          <a:p>
-            <a:pPr indent="0" marL="0">
-              <a:buNone/>
-            </a:pPr>
-            <a:r>
-              <a:rPr lang="en-US" sz="2100" b="1" dirty="0">
+            <a:endParaRPr lang="en-US" sz="760" dirty="0"/>
+          </a:p>
+        </p:txBody>
+      </p:sp>
+      <p:sp>
+        <p:nvSpPr>
+          <p:cNvPr id="9" name="Text 6"/>
+          <p:cNvSpPr/>
+          <p:nvPr/>
+        </p:nvSpPr>
+        <p:spPr>
+          <a:xfrm>
+            <a:off x="2194560" y="4846320"/>
+            <a:ext cx="1554480" cy="365760"/>
+          </a:xfrm>
+          <a:prstGeom prst="rect">
+            <a:avLst/>
+          </a:prstGeom>
+          <a:noFill/>
+          <a:ln/>
+        </p:spPr>
+        <p:txBody>
+          <a:bodyPr wrap="square" lIns="0" tIns="0" rIns="0" bIns="0" rtlCol="0" anchor="ctr"/>
+          <a:lstStyle/>
+          <a:p>
+            <a:pPr indent="0" marL="0">
+              <a:buNone/>
+            </a:pPr>
+            <a:r>
+              <a:rPr lang="en-US" sz="2000" b="1" dirty="0">
                 <a:solidFill>
                   <a:srgbClr val="FFFFFF"/>
                 </a:solidFill>
@@ -2108,20 +2045,20 @@
               </a:rPr>
               <a:t>$700K</a:t>
             </a:r>
-            <a:endParaRPr lang="en-US" sz="2100" dirty="0"/>
-          </a:p>
-        </p:txBody>
-      </p:sp>
-      <p:sp>
-        <p:nvSpPr>
-          <p:cNvPr id="13" name="Text 10"/>
-          <p:cNvSpPr/>
-          <p:nvPr/>
-        </p:nvSpPr>
-        <p:spPr>
-          <a:xfrm>
-            <a:off x="2194560" y="3959352"/>
-            <a:ext cx="1554480" cy="457200"/>
+            <a:endParaRPr lang="en-US" sz="2000" dirty="0"/>
+          </a:p>
+        </p:txBody>
+      </p:sp>
+      <p:sp>
+        <p:nvSpPr>
+          <p:cNvPr id="10" name="Text 7"/>
+          <p:cNvSpPr/>
+          <p:nvPr/>
+        </p:nvSpPr>
+        <p:spPr>
+          <a:xfrm>
+            <a:off x="2194560" y="5212080"/>
+            <a:ext cx="1554480" cy="274320"/>
           </a:xfrm>
           <a:prstGeom prst="rect">
             <a:avLst/>
@@ -2140,7 +2077,7 @@
               <a:buNone/>
             </a:pPr>
             <a:r>
-              <a:rPr lang="en-US" sz="780" spc="80" kern="0" dirty="0">
+              <a:rPr lang="en-US" sz="760" spc="70" kern="0" dirty="0">
                 <a:solidFill>
                   <a:srgbClr val="9FC0C8"/>
                 </a:solidFill>
@@ -2150,36 +2087,36 @@
               </a:rPr>
               <a:t>PHASE 1 DEBT RAISE</a:t>
             </a:r>
-            <a:endParaRPr lang="en-US" sz="780" dirty="0"/>
-          </a:p>
-        </p:txBody>
-      </p:sp>
-      <p:sp>
-        <p:nvSpPr>
-          <p:cNvPr id="14" name="Text 11"/>
-          <p:cNvSpPr/>
-          <p:nvPr/>
-        </p:nvSpPr>
-        <p:spPr>
-          <a:xfrm>
-            <a:off x="3822192" y="3566160"/>
-            <a:ext cx="1554480" cy="384048"/>
-          </a:xfrm>
-          <a:prstGeom prst="rect">
-            <a:avLst/>
-          </a:prstGeom>
-          <a:noFill/>
-          <a:ln/>
-        </p:spPr>
-        <p:txBody>
-          <a:bodyPr wrap="square" lIns="0" tIns="0" rIns="0" bIns="0" rtlCol="0" anchor="ctr"/>
-          <a:lstStyle/>
-          <a:p>
-            <a:pPr indent="0" marL="0">
-              <a:buNone/>
-            </a:pPr>
-            <a:r>
-              <a:rPr lang="en-US" sz="2100" b="1" dirty="0">
+            <a:endParaRPr lang="en-US" sz="760" dirty="0"/>
+          </a:p>
+        </p:txBody>
+      </p:sp>
+      <p:sp>
+        <p:nvSpPr>
+          <p:cNvPr id="11" name="Text 8"/>
+          <p:cNvSpPr/>
+          <p:nvPr/>
+        </p:nvSpPr>
+        <p:spPr>
+          <a:xfrm>
+            <a:off x="3822192" y="4846320"/>
+            <a:ext cx="1554480" cy="365760"/>
+          </a:xfrm>
+          <a:prstGeom prst="rect">
+            <a:avLst/>
+          </a:prstGeom>
+          <a:noFill/>
+          <a:ln/>
+        </p:spPr>
+        <p:txBody>
+          <a:bodyPr wrap="square" lIns="0" tIns="0" rIns="0" bIns="0" rtlCol="0" anchor="ctr"/>
+          <a:lstStyle/>
+          <a:p>
+            <a:pPr indent="0" marL="0">
+              <a:buNone/>
+            </a:pPr>
+            <a:r>
+              <a:rPr lang="en-US" sz="2000" b="1" dirty="0">
                 <a:solidFill>
                   <a:srgbClr val="FFFFFF"/>
                 </a:solidFill>
@@ -2189,20 +2126,20 @@
               </a:rPr>
               <a:t>20%</a:t>
             </a:r>
-            <a:endParaRPr lang="en-US" sz="2100" dirty="0"/>
-          </a:p>
-        </p:txBody>
-      </p:sp>
-      <p:sp>
-        <p:nvSpPr>
-          <p:cNvPr id="15" name="Text 12"/>
-          <p:cNvSpPr/>
-          <p:nvPr/>
-        </p:nvSpPr>
-        <p:spPr>
-          <a:xfrm>
-            <a:off x="3822192" y="3959352"/>
-            <a:ext cx="1554480" cy="457200"/>
+            <a:endParaRPr lang="en-US" sz="2000" dirty="0"/>
+          </a:p>
+        </p:txBody>
+      </p:sp>
+      <p:sp>
+        <p:nvSpPr>
+          <p:cNvPr id="12" name="Text 9"/>
+          <p:cNvSpPr/>
+          <p:nvPr/>
+        </p:nvSpPr>
+        <p:spPr>
+          <a:xfrm>
+            <a:off x="3822192" y="5212080"/>
+            <a:ext cx="1554480" cy="274320"/>
           </a:xfrm>
           <a:prstGeom prst="rect">
             <a:avLst/>
@@ -2221,7 +2158,7 @@
               <a:buNone/>
             </a:pPr>
             <a:r>
-              <a:rPr lang="en-US" sz="780" spc="80" kern="0" dirty="0">
+              <a:rPr lang="en-US" sz="760" spc="70" kern="0" dirty="0">
                 <a:solidFill>
                   <a:srgbClr val="9FC0C8"/>
                 </a:solidFill>
@@ -2231,56 +2168,56 @@
               </a:rPr>
               <a:t>FIXED, PAID QUARTERLY</a:t>
             </a:r>
-            <a:endParaRPr lang="en-US" sz="780" dirty="0"/>
-          </a:p>
-        </p:txBody>
-      </p:sp>
-      <p:sp>
-        <p:nvSpPr>
-          <p:cNvPr id="16" name="Shape 13"/>
-          <p:cNvSpPr/>
-          <p:nvPr/>
-        </p:nvSpPr>
-        <p:spPr>
-          <a:xfrm>
-            <a:off x="566928" y="4736592"/>
-            <a:ext cx="4937760" cy="10973"/>
+            <a:endParaRPr lang="en-US" sz="760" dirty="0"/>
+          </a:p>
+        </p:txBody>
+      </p:sp>
+      <p:sp>
+        <p:nvSpPr>
+          <p:cNvPr id="13" name="Shape 10"/>
+          <p:cNvSpPr/>
+          <p:nvPr/>
+        </p:nvSpPr>
+        <p:spPr>
+          <a:xfrm>
+            <a:off x="566928" y="5669280"/>
+            <a:ext cx="5120640" cy="10973"/>
           </a:xfrm>
           <a:prstGeom prst="rect">
             <a:avLst/>
           </a:prstGeom>
           <a:solidFill>
-            <a:srgbClr val="2C5566"/>
+            <a:srgbClr val="3C6272"/>
           </a:solidFill>
           <a:ln/>
         </p:spPr>
       </p:sp>
       <p:sp>
         <p:nvSpPr>
-          <p:cNvPr id="17" name="Text 14"/>
-          <p:cNvSpPr/>
-          <p:nvPr/>
-        </p:nvSpPr>
-        <p:spPr>
-          <a:xfrm>
-            <a:off x="566928" y="4882896"/>
-            <a:ext cx="4937760" cy="256032"/>
-          </a:xfrm>
-          <a:prstGeom prst="rect">
-            <a:avLst/>
-          </a:prstGeom>
-          <a:noFill/>
-          <a:ln/>
-        </p:spPr>
-        <p:txBody>
-          <a:bodyPr wrap="square" lIns="0" tIns="0" rIns="0" bIns="0" rtlCol="0" anchor="ctr"/>
-          <a:lstStyle/>
-          <a:p>
-            <a:pPr indent="0" marL="0">
-              <a:buNone/>
-            </a:pPr>
-            <a:r>
-              <a:rPr lang="en-US" sz="1000" b="1" spc="140" kern="0" dirty="0">
+          <p:cNvPr id="14" name="Text 11"/>
+          <p:cNvSpPr/>
+          <p:nvPr/>
+        </p:nvSpPr>
+        <p:spPr>
+          <a:xfrm>
+            <a:off x="566928" y="5797296"/>
+            <a:ext cx="5303520" cy="237744"/>
+          </a:xfrm>
+          <a:prstGeom prst="rect">
+            <a:avLst/>
+          </a:prstGeom>
+          <a:noFill/>
+          <a:ln/>
+        </p:spPr>
+        <p:txBody>
+          <a:bodyPr wrap="square" lIns="0" tIns="0" rIns="0" bIns="0" rtlCol="0" anchor="ctr"/>
+          <a:lstStyle/>
+          <a:p>
+            <a:pPr indent="0" marL="0">
+              <a:buNone/>
+            </a:pPr>
+            <a:r>
+              <a:rPr lang="en-US" sz="900" b="1" spc="110" kern="0" dirty="0">
                 <a:solidFill>
                   <a:srgbClr val="E3C581"/>
                 </a:solidFill>
@@ -2288,61 +2225,22 @@
                 <a:ea typeface="Calibri" pitchFamily="34" charset="-122"/>
                 <a:cs typeface="Calibri" pitchFamily="34" charset="-120"/>
               </a:rPr>
-              <a:t>DEBT INVESTMENT  ·  SECURED PROMISSORY NOTE</a:t>
-            </a:r>
-            <a:endParaRPr lang="en-US" sz="1000" dirty="0"/>
-          </a:p>
-        </p:txBody>
-      </p:sp>
-      <p:sp>
-        <p:nvSpPr>
-          <p:cNvPr id="18" name="Text 15"/>
-          <p:cNvSpPr/>
-          <p:nvPr/>
-        </p:nvSpPr>
-        <p:spPr>
-          <a:xfrm>
-            <a:off x="566928" y="5157216"/>
-            <a:ext cx="4937760" cy="219456"/>
-          </a:xfrm>
-          <a:prstGeom prst="rect">
-            <a:avLst/>
-          </a:prstGeom>
-          <a:noFill/>
-          <a:ln/>
-        </p:spPr>
-        <p:txBody>
-          <a:bodyPr wrap="square" lIns="0" tIns="0" rIns="0" bIns="0" rtlCol="0" anchor="ctr"/>
-          <a:lstStyle/>
-          <a:p>
-            <a:pPr indent="0" marL="0">
-              <a:buNone/>
-            </a:pPr>
-            <a:r>
-              <a:rPr lang="en-US" sz="950" spc="140" kern="0" dirty="0">
-                <a:solidFill>
-                  <a:srgbClr val="9FC0C8"/>
-                </a:solidFill>
-                <a:latin typeface="Calibri" pitchFamily="34" charset="0"/>
-                <a:ea typeface="Calibri" pitchFamily="34" charset="-122"/>
-                <a:cs typeface="Calibri" pitchFamily="34" charset="-120"/>
-              </a:rPr>
-              <a:t>AUGUST 2026</a:t>
-            </a:r>
-            <a:endParaRPr lang="en-US" sz="950" dirty="0"/>
-          </a:p>
-        </p:txBody>
-      </p:sp>
-      <p:sp>
-        <p:nvSpPr>
-          <p:cNvPr id="19" name="Text 16"/>
-          <p:cNvSpPr/>
-          <p:nvPr/>
-        </p:nvSpPr>
-        <p:spPr>
-          <a:xfrm>
-            <a:off x="566928" y="5468112"/>
-            <a:ext cx="4937760" cy="457200"/>
+              <a:t>DEBT INVESTMENT  ·  SECURED PROMISSORY NOTE  ·  AUGUST 2026</a:t>
+            </a:r>
+            <a:endParaRPr lang="en-US" sz="900" dirty="0"/>
+          </a:p>
+        </p:txBody>
+      </p:sp>
+      <p:sp>
+        <p:nvSpPr>
+          <p:cNvPr id="15" name="Text 12"/>
+          <p:cNvSpPr/>
+          <p:nvPr/>
+        </p:nvSpPr>
+        <p:spPr>
+          <a:xfrm>
+            <a:off x="566928" y="6089904"/>
+            <a:ext cx="5120640" cy="402336"/>
           </a:xfrm>
           <a:prstGeom prst="rect">
             <a:avLst/>
@@ -2356,14 +2254,14 @@
           <a:p>
             <a:pPr indent="0" marL="0">
               <a:lnSpc>
-                <a:spcPts val="1100"/>
+                <a:spcPts val="1000"/>
               </a:lnSpc>
               <a:buNone/>
             </a:pPr>
             <a:r>
-              <a:rPr lang="en-US" sz="850" dirty="0">
-                <a:solidFill>
-                  <a:srgbClr val="5B7F8A"/>
+              <a:rPr lang="en-US" sz="800" dirty="0">
+                <a:solidFill>
+                  <a:srgbClr val="8FAAB4"/>
                 </a:solidFill>
                 <a:latin typeface="Calibri" pitchFamily="34" charset="0"/>
                 <a:ea typeface="Calibri" pitchFamily="34" charset="-122"/>
@@ -2371,7 +2269,7 @@
               </a:rPr>
               <a:t>Debt only — no equity is offered. Confidential, prepared for the named recipient only. Not an offer to sell securities.</a:t>
             </a:r>
-            <a:endParaRPr lang="en-US" sz="850" dirty="0"/>
+            <a:endParaRPr lang="en-US" sz="800" dirty="0"/>
           </a:p>
         </p:txBody>
       </p:sp>

--- a/deck/3331-Trumbull-Investor-Deck-Aug-2026.pptx
+++ b/deck/3331-Trumbull-Investor-Deck-Aug-2026.pptx
@@ -5064,7 +5064,7 @@
                 <a:ea typeface="Calibri" pitchFamily="34" charset="-122"/>
                 <a:cs typeface="Calibri" pitchFamily="34" charset="-120"/>
               </a:rPr>
-              <a:t>PROJECTED</a:t>
+              <a:t>TOTAL PROJECTED</a:t>
             </a:r>
             <a:endParaRPr lang="en-US" sz="850" dirty="0"/>
           </a:p>
@@ -5084,7 +5084,7 @@
                 <a:ea typeface="Calibri" pitchFamily="34" charset="-122"/>
                 <a:cs typeface="Calibri" pitchFamily="34" charset="-120"/>
               </a:rPr>
-              <a:t>GROSS REVENUE</a:t>
+              <a:t>REVENUE</a:t>
             </a:r>
             <a:endParaRPr lang="en-US" sz="850" dirty="0"/>
           </a:p>
@@ -11493,7 +11493,7 @@
                 <a:ea typeface="Cambria" pitchFamily="34" charset="-122"/>
                 <a:cs typeface="Cambria" pitchFamily="34" charset="-120"/>
               </a:rPr>
-              <a:t>$288</a:t>
+              <a:t>$285</a:t>
             </a:r>
             <a:endParaRPr lang="en-US" sz="3000" dirty="0"/>
           </a:p>
@@ -12861,7 +12861,7 @@
                 <a:ea typeface="Cambria" pitchFamily="34" charset="-122"/>
                 <a:cs typeface="Cambria" pitchFamily="34" charset="-120"/>
               </a:rPr>
-              <a:t>$288</a:t>
+              <a:t>$285</a:t>
             </a:r>
             <a:endParaRPr lang="en-US" sz="2500" dirty="0"/>
           </a:p>
@@ -12903,7 +12903,7 @@
                 <a:ea typeface="Calibri" pitchFamily="34" charset="-122"/>
                 <a:cs typeface="Calibri" pitchFamily="34" charset="-120"/>
               </a:rPr>
-              <a:t>BLENDED PRICE</a:t>
+              <a:t>BLENDED LAUNCH</a:t>
             </a:r>
             <a:endParaRPr lang="en-US" sz="850" dirty="0"/>
           </a:p>
@@ -12923,7 +12923,7 @@
                 <a:ea typeface="Calibri" pitchFamily="34" charset="-122"/>
                 <a:cs typeface="Calibri" pitchFamily="34" charset="-120"/>
               </a:rPr>
-              <a:t>PER SQUARE FOOT</a:t>
+              <a:t>PRICE PER SF</a:t>
             </a:r>
             <a:endParaRPr lang="en-US" sz="850" dirty="0"/>
           </a:p>
